--- a/docs/BPO検討_経営上程版.pptx
+++ b/docs/BPO検討_経営上程版.pptx
@@ -16,11 +16,14 @@
     <p:sldId id="2147483618" r:id="rId7"/>
     <p:sldId id="2147483621" r:id="rId8"/>
     <p:sldId id="2147483623" r:id="rId9"/>
+    <p:sldId id="2147483627" r:id="rId22"/>
+    <p:sldId id="2147483628" r:id="rId23"/>
     <p:sldId id="2147483625" r:id="rId10"/>
     <p:sldId id="2147483624" r:id="rId11"/>
     <p:sldId id="2147483620" r:id="rId12"/>
     <p:sldId id="2147483619" r:id="rId13"/>
     <p:sldId id="2147483626" r:id="rId21"/>
+    <p:sldId id="2147483629" r:id="rId24"/>
   </p:sldIdLst>
   <p:sldSz cx="12192000" cy="6858000"/>
   <p:notesSz cx="6858000" cy="9144000"/>
@@ -4161,6 +4164,2085 @@
                 <a:ea typeface="Meiryo UI" panose="020B0604030504040204" pitchFamily="50" charset="-128"/>
               </a:rPr>
               <a:t>設計書・手順書に加えソースコードをAI分析基盤に読み込ませ、アプリ構造・影響範囲を即答できる状態を構築。GitHub等でのソースコード管理への移行も可能</a:t>
+            </a:r>
+            <a:r>
+              <a:rPr kumimoji="1" lang="en-US" altLang="ja-JP" sz="1100" dirty="0">
+                <a:solidFill>
+                  <a:schemeClr val="tx1"/>
+                </a:solidFill>
+                <a:latin typeface="Meiryo UI" panose="020B0604030504040204" pitchFamily="50" charset="-128"/>
+                <a:ea typeface="Meiryo UI" panose="020B0604030504040204" pitchFamily="50" charset="-128"/>
+              </a:rPr>
+              <a:t/>
+            </a:r>
+            <a:r>
+              <a:rPr kumimoji="1" lang="ja-JP" altLang="en-US" sz="1100" dirty="0">
+                <a:solidFill>
+                  <a:schemeClr val="tx1"/>
+                </a:solidFill>
+                <a:latin typeface="Meiryo UI" panose="020B0604030504040204" pitchFamily="50" charset="-128"/>
+                <a:ea typeface="Meiryo UI" panose="020B0604030504040204" pitchFamily="50" charset="-128"/>
+              </a:rPr>
+              <a:t/>
+            </a:r>
+          </a:p>
+          <a:p>
+            <a:pPr marL="285750" indent="-285750">
+              <a:buFont typeface="Arial" panose="020B0604020202020204" pitchFamily="34" charset="0"/>
+              <a:buChar char="•"/>
+            </a:pPr>
+            <a:r>
+              <a:rPr kumimoji="1" lang="ja-JP" altLang="en-US" sz="1100" dirty="0">
+                <a:solidFill>
+                  <a:schemeClr val="tx1"/>
+                </a:solidFill>
+                <a:latin typeface="Meiryo UI" panose="020B0604030504040204" pitchFamily="50" charset="-128"/>
+                <a:ea typeface="Meiryo UI" panose="020B0604030504040204" pitchFamily="50" charset="-128"/>
+              </a:rPr>
+              <a:t/>
+            </a:r>
+          </a:p>
+          <a:p>
+            <a:pPr marL="285750" indent="-285750">
+              <a:buFont typeface="Arial" panose="020B0604020202020204" pitchFamily="34" charset="0"/>
+              <a:buChar char="•"/>
+            </a:pPr>
+            <a:r>
+              <a:rPr kumimoji="1" lang="ja-JP" altLang="en-US" sz="1100" dirty="0">
+                <a:solidFill>
+                  <a:schemeClr val="tx1"/>
+                </a:solidFill>
+                <a:latin typeface="Meiryo UI" panose="020B0604030504040204" pitchFamily="50" charset="-128"/>
+                <a:ea typeface="Meiryo UI" panose="020B0604030504040204" pitchFamily="50" charset="-128"/>
+              </a:rPr>
+              <a:t/>
+            </a:r>
+          </a:p>
+          <a:p>
+            <a:pPr marL="285750" indent="-285750">
+              <a:buFont typeface="Arial" panose="020B0604020202020204" pitchFamily="34" charset="0"/>
+              <a:buChar char="•"/>
+            </a:pPr>
+            <a:r>
+              <a:rPr kumimoji="1" lang="ja-JP" altLang="en-US" sz="1100" dirty="0">
+                <a:solidFill>
+                  <a:schemeClr val="tx1"/>
+                </a:solidFill>
+                <a:latin typeface="Meiryo UI" panose="020B0604030504040204" pitchFamily="50" charset="-128"/>
+                <a:ea typeface="Meiryo UI" panose="020B0604030504040204" pitchFamily="50" charset="-128"/>
+              </a:rPr>
+              <a:t/>
+            </a:r>
+            <a:endParaRPr kumimoji="1" lang="en-US" altLang="ja-JP" sz="1100" dirty="0">
+              <a:solidFill>
+                <a:schemeClr val="tx1"/>
+              </a:solidFill>
+              <a:latin typeface="Meiryo UI" panose="020B0604030504040204" pitchFamily="50" charset="-128"/>
+              <a:ea typeface="Meiryo UI" panose="020B0604030504040204" pitchFamily="50" charset="-128"/>
+            </a:endParaRPr>
+          </a:p>
+          <a:p>
+            <a:pPr marL="285750" indent="-285750">
+              <a:buFont typeface="Arial" panose="020B0604020202020204" pitchFamily="34" charset="0"/>
+              <a:buChar char="•"/>
+            </a:pPr>
+            <a:r>
+              <a:rPr lang="ja-JP" altLang="en-US" sz="1100" dirty="0">
+                <a:solidFill>
+                  <a:schemeClr val="tx1"/>
+                </a:solidFill>
+                <a:latin typeface="Meiryo UI" panose="020B0604030504040204" pitchFamily="50" charset="-128"/>
+                <a:ea typeface="Meiryo UI" panose="020B0604030504040204" pitchFamily="50" charset="-128"/>
+              </a:rPr>
+              <a:t/>
+            </a:r>
+            <a:endParaRPr lang="en-US" altLang="ja-JP" sz="1100" dirty="0">
+              <a:solidFill>
+                <a:schemeClr val="tx1"/>
+              </a:solidFill>
+              <a:latin typeface="Meiryo UI" panose="020B0604030504040204" pitchFamily="50" charset="-128"/>
+              <a:ea typeface="Meiryo UI" panose="020B0604030504040204" pitchFamily="50" charset="-128"/>
+            </a:endParaRPr>
+          </a:p>
+          <a:p>
+            <a:pPr marL="742950" lvl="1" indent="-285750">
+              <a:buFont typeface="Arial" panose="020B0604020202020204" pitchFamily="34" charset="0"/>
+              <a:buChar char="•"/>
+            </a:pPr>
+            <a:r>
+              <a:rPr lang="ja-JP" altLang="en-US" sz="1100" dirty="0">
+                <a:solidFill>
+                  <a:schemeClr val="tx1"/>
+                </a:solidFill>
+                <a:latin typeface="Meiryo UI" panose="020B0604030504040204" pitchFamily="50" charset="-128"/>
+                <a:ea typeface="Meiryo UI" panose="020B0604030504040204" pitchFamily="50" charset="-128"/>
+              </a:rPr>
+              <a:t/>
+            </a:r>
+            <a:endParaRPr lang="en-US" altLang="ja-JP" sz="1100" dirty="0">
+              <a:solidFill>
+                <a:schemeClr val="tx1"/>
+              </a:solidFill>
+              <a:latin typeface="Meiryo UI" panose="020B0604030504040204" pitchFamily="50" charset="-128"/>
+              <a:ea typeface="Meiryo UI" panose="020B0604030504040204" pitchFamily="50" charset="-128"/>
+            </a:endParaRPr>
+          </a:p>
+          <a:p>
+            <a:pPr marL="285750" indent="-285750">
+              <a:buFont typeface="Arial" panose="020B0604020202020204" pitchFamily="34" charset="0"/>
+              <a:buChar char="•"/>
+            </a:pPr>
+            <a:r>
+              <a:rPr lang="en-US" altLang="ja-JP" sz="1100" dirty="0">
+                <a:solidFill>
+                  <a:schemeClr val="tx1"/>
+                </a:solidFill>
+                <a:latin typeface="Meiryo UI" panose="020B0604030504040204" pitchFamily="50" charset="-128"/>
+                <a:ea typeface="Meiryo UI" panose="020B0604030504040204" pitchFamily="50" charset="-128"/>
+              </a:rPr>
+              <a:t/>
+            </a:r>
+          </a:p>
+        </p:txBody>
+      </p:sp>
+    </p:spTree>
+    <p:extLst>
+      <p:ext uri="{BB962C8B-B14F-4D97-AF65-F5344CB8AC3E}">
+        <p14:creationId xmlns:p14="http://schemas.microsoft.com/office/powerpoint/2010/main" val="2701157942"/>
+      </p:ext>
+    </p:extLst>
+  </p:cSld>
+  <p:clrMapOvr>
+    <a:masterClrMapping/>
+  </p:clrMapOvr>
+</p:sld>
+</file>
+
+<file path=ppt/slides/slide11.xml><?xml version="1.0" encoding="utf-8"?>
+<p:sld xmlns:a="http://schemas.openxmlformats.org/drawingml/2006/main" xmlns:r="http://schemas.openxmlformats.org/officeDocument/2006/relationships" xmlns:p="http://schemas.openxmlformats.org/presentationml/2006/main">
+  <p:cSld>
+    <p:spTree>
+      <p:nvGrpSpPr>
+        <p:cNvPr id="1" name=""/>
+        <p:cNvGrpSpPr/>
+        <p:nvPr/>
+      </p:nvGrpSpPr>
+      <p:grpSpPr>
+        <a:xfrm>
+          <a:off x="0" y="0"/>
+          <a:ext cx="0" cy="0"/>
+          <a:chOff x="0" y="0"/>
+          <a:chExt cx="0" cy="0"/>
+        </a:xfrm>
+      </p:grpSpPr>
+      <p:sp>
+        <p:nvSpPr>
+          <p:cNvPr id="2" name="タイトル 1">
+            <a:extLst>
+              <a:ext uri="{FF2B5EF4-FFF2-40B4-BE49-F238E27FC236}">
+                <a16:creationId xmlns:a16="http://schemas.microsoft.com/office/drawing/2014/main" id="{3A9DF23B-BA22-10F6-2EAF-BAA812C01C4E}"/>
+              </a:ext>
+            </a:extLst>
+          </p:cNvPr>
+          <p:cNvSpPr>
+            <a:spLocks noGrp="1"/>
+          </p:cNvSpPr>
+          <p:nvPr>
+            <p:ph type="title"/>
+          </p:nvPr>
+        </p:nvSpPr>
+        <p:spPr/>
+        <p:txBody>
+          <a:bodyPr/>
+          <a:lstStyle/>
+          <a:p>
+            <a:r>
+              <a:rPr lang="en-US" altLang="ja-JP" dirty="0"/>
+              <a:t>放置シナリオと投資対効果</a:t>
+            </a:r>
+            <a:br>
+              <a:rPr lang="en-US" altLang="ja-JP" dirty="0"/>
+            </a:br>
+            <a:r>
+              <a:rPr lang="ja-JP" altLang="en-US" dirty="0"/>
+              <a:t/>
+            </a:r>
+            <a:endParaRPr kumimoji="1" lang="ja-JP" altLang="en-US" dirty="0"/>
+          </a:p>
+        </p:txBody>
+      </p:sp>
+      <p:sp>
+        <p:nvSpPr>
+          <p:cNvPr id="3" name="テキスト プレースホルダー 2">
+            <a:extLst>
+              <a:ext uri="{FF2B5EF4-FFF2-40B4-BE49-F238E27FC236}">
+                <a16:creationId xmlns:a16="http://schemas.microsoft.com/office/drawing/2014/main" id="{2AFD4DED-D640-BD1D-F8CD-28521C342DA3}"/>
+              </a:ext>
+            </a:extLst>
+          </p:cNvPr>
+          <p:cNvSpPr>
+            <a:spLocks noGrp="1"/>
+          </p:cNvSpPr>
+          <p:nvPr>
+            <p:ph type="body" sz="quarter" idx="13"/>
+          </p:nvPr>
+        </p:nvSpPr>
+        <p:spPr/>
+        <p:txBody>
+          <a:bodyPr/>
+          <a:lstStyle/>
+          <a:p>
+            <a:r>
+              <a:rPr lang="ja-JP" altLang="en-US" dirty="0"/>
+              <a:t>現状維持は「無料」ではない — 年1.4億円の隠れコストと拡大するギャップを毎年承認し続けることと同義</a:t>
+            </a:r>
+            <a:endParaRPr lang="en-US" altLang="ja-JP" dirty="0"/>
+          </a:p>
+        </p:txBody>
+      </p:sp>
+      <p:sp>
+        <p:nvSpPr>
+          <p:cNvPr id="4" name="正方形/長方形 3">
+            <a:extLst>
+              <a:ext uri="{FF2B5EF4-FFF2-40B4-BE49-F238E27FC236}">
+                <a16:creationId xmlns:a16="http://schemas.microsoft.com/office/drawing/2014/main" id="{790EBD07-8EFA-8601-EF01-DC465479B26E}"/>
+              </a:ext>
+            </a:extLst>
+          </p:cNvPr>
+          <p:cNvSpPr/>
+          <p:nvPr/>
+        </p:nvSpPr>
+        <p:spPr>
+          <a:xfrm>
+            <a:off x="334963" y="1628775"/>
+            <a:ext cx="11522075" cy="4679950"/>
+          </a:xfrm>
+          <a:prstGeom prst="rect">
+            <a:avLst/>
+          </a:prstGeom>
+          <a:solidFill>
+            <a:schemeClr val="accent6">
+              <a:lumMod val="20000"/>
+              <a:lumOff val="80000"/>
+            </a:schemeClr>
+          </a:solidFill>
+          <a:ln w="3175">
+            <a:noFill/>
+          </a:ln>
+          <a:effectLst/>
+        </p:spPr>
+        <p:style>
+          <a:lnRef idx="1">
+            <a:schemeClr val="accent1"/>
+          </a:lnRef>
+          <a:fillRef idx="3">
+            <a:schemeClr val="accent1"/>
+          </a:fillRef>
+          <a:effectRef idx="2">
+            <a:schemeClr val="accent1"/>
+          </a:effectRef>
+          <a:fontRef idx="minor">
+            <a:schemeClr val="lt1"/>
+          </a:fontRef>
+        </p:style>
+        <p:txBody>
+          <a:bodyPr rot="0" spcFirstLastPara="0" vertOverflow="overflow" horzOverflow="overflow" vert="horz" wrap="square" lIns="36000" tIns="36000" rIns="36000" bIns="36000" numCol="1" spcCol="0" rtlCol="0" fromWordArt="0" anchor="t" anchorCtr="0" forceAA="0" compatLnSpc="1">
+            <a:prstTxWarp prst="textNoShape">
+              <a:avLst/>
+            </a:prstTxWarp>
+            <a:noAutofit/>
+          </a:bodyPr>
+          <a:lstStyle/>
+          <a:p>
+            <a:pPr marL="285750" indent="-285750">
+              <a:buFont typeface="Arial" panose="020B0604020202020204" pitchFamily="34" charset="0"/>
+              <a:buChar char="•"/>
+            </a:pPr>
+            <a:r>
+              <a:rPr kumimoji="1" lang="ja-JP" altLang="en-US" sz="1100" dirty="0">
+                <a:solidFill>
+                  <a:schemeClr val="tx1"/>
+                </a:solidFill>
+                <a:latin typeface="Meiryo UI" panose="020B0604030504040204" pitchFamily="50" charset="-128"/>
+                <a:ea typeface="Meiryo UI" panose="020B0604030504040204" pitchFamily="50" charset="-128"/>
+              </a:rPr>
+              <a:t>【放置した場合（現状維持シナリオ）】</a:t>
+            </a:r>
+          </a:p>
+          <a:p>
+            <a:pPr marL="742950" lvl="1" indent="-285750">
+              <a:buFont typeface="Arial" panose="020B0604020202020204" pitchFamily="34" charset="0"/>
+              <a:buChar char="•"/>
+            </a:pPr>
+            <a:r>
+              <a:rPr kumimoji="1" lang="ja-JP" altLang="en-US" sz="1100" dirty="0">
+                <a:solidFill>
+                  <a:schemeClr val="tx1"/>
+                </a:solidFill>
+                <a:latin typeface="Meiryo UI" panose="020B0604030504040204" pitchFamily="50" charset="-128"/>
+                <a:ea typeface="Meiryo UI" panose="020B0604030504040204" pitchFamily="50" charset="-128"/>
+              </a:rPr>
+              <a:t>隠れ人件費 年1.4億円（12FTE）が継続。運用需要は5年で約1.5倍に拡大し、負担は年々増加</a:t>
+            </a:r>
+            <a:r>
+              <a:rPr kumimoji="1" lang="en-US" altLang="ja-JP" sz="1100" dirty="0">
+                <a:solidFill>
+                  <a:schemeClr val="tx1"/>
+                </a:solidFill>
+                <a:latin typeface="Meiryo UI" panose="020B0604030504040204" pitchFamily="50" charset="-128"/>
+                <a:ea typeface="Meiryo UI" panose="020B0604030504040204" pitchFamily="50" charset="-128"/>
+              </a:rPr>
+              <a:t/>
+            </a:r>
+            <a:r>
+              <a:rPr kumimoji="1" lang="ja-JP" altLang="en-US" sz="1100" dirty="0">
+                <a:solidFill>
+                  <a:schemeClr val="tx1"/>
+                </a:solidFill>
+                <a:latin typeface="Meiryo UI" panose="020B0604030504040204" pitchFamily="50" charset="-128"/>
+                <a:ea typeface="Meiryo UI" panose="020B0604030504040204" pitchFamily="50" charset="-128"/>
+              </a:rPr>
+              <a:t/>
+            </a:r>
+            <a:r>
+              <a:rPr kumimoji="1" lang="en-US" altLang="ja-JP" sz="1100" dirty="0">
+                <a:solidFill>
+                  <a:schemeClr val="tx1"/>
+                </a:solidFill>
+                <a:latin typeface="Meiryo UI" panose="020B0604030504040204" pitchFamily="50" charset="-128"/>
+                <a:ea typeface="Meiryo UI" panose="020B0604030504040204" pitchFamily="50" charset="-128"/>
+              </a:rPr>
+              <a:t/>
+            </a:r>
+            <a:r>
+              <a:rPr kumimoji="1" lang="ja-JP" altLang="en-US" sz="1100" dirty="0">
+                <a:solidFill>
+                  <a:schemeClr val="tx1"/>
+                </a:solidFill>
+                <a:latin typeface="Meiryo UI" panose="020B0604030504040204" pitchFamily="50" charset="-128"/>
+                <a:ea typeface="Meiryo UI" panose="020B0604030504040204" pitchFamily="50" charset="-128"/>
+              </a:rPr>
+              <a:t/>
+            </a:r>
+            <a:endParaRPr kumimoji="1" lang="en-US" altLang="ja-JP" sz="1100" dirty="0">
+              <a:solidFill>
+                <a:schemeClr val="tx1"/>
+              </a:solidFill>
+              <a:latin typeface="Meiryo UI" panose="020B0604030504040204" pitchFamily="50" charset="-128"/>
+              <a:ea typeface="Meiryo UI" panose="020B0604030504040204" pitchFamily="50" charset="-128"/>
+            </a:endParaRPr>
+          </a:p>
+          <a:p>
+            <a:pPr marL="742950" lvl="1" indent="-285750">
+              <a:buFont typeface="Arial" panose="020B0604020202020204" pitchFamily="34" charset="0"/>
+              <a:buChar char="•"/>
+            </a:pPr>
+            <a:r>
+              <a:rPr kumimoji="1" lang="ja-JP" altLang="en-US" sz="1100" dirty="0">
+                <a:solidFill>
+                  <a:schemeClr val="tx1"/>
+                </a:solidFill>
+                <a:latin typeface="Meiryo UI" panose="020B0604030504040204" pitchFamily="50" charset="-128"/>
+                <a:ea typeface="Meiryo UI" panose="020B0604030504040204" pitchFamily="50" charset="-128"/>
+              </a:rPr>
+              <a:t>属人リスクはシニア社員の異動・退職のたびに顕在化。ノウハウを文書化できる人材は年々減少し、移管コストは将来ほど高くつく</a:t>
+            </a:r>
+          </a:p>
+          <a:p>
+            <a:pPr marL="742950" lvl="1" indent="-285750">
+              <a:buFont typeface="Arial" panose="020B0604020202020204" pitchFamily="34" charset="0"/>
+              <a:buChar char="•"/>
+            </a:pPr>
+            <a:r>
+              <a:rPr kumimoji="1" lang="ja-JP" altLang="en-US" sz="1100" dirty="0">
+                <a:solidFill>
+                  <a:schemeClr val="tx1"/>
+                </a:solidFill>
+                <a:latin typeface="Meiryo UI" panose="020B0604030504040204" pitchFamily="50" charset="-128"/>
+                <a:ea typeface="Meiryo UI" panose="020B0604030504040204" pitchFamily="50" charset="-128"/>
+              </a:rPr>
+              <a:t>障害エクスポージャ（最大11億円/日の出荷リスク）を統制なしで保有し続ける</a:t>
+            </a:r>
+            <a:endParaRPr kumimoji="1" lang="en-US" altLang="ja-JP" sz="1100" dirty="0">
+              <a:solidFill>
+                <a:schemeClr val="tx1"/>
+              </a:solidFill>
+              <a:latin typeface="Meiryo UI" panose="020B0604030504040204" pitchFamily="50" charset="-128"/>
+              <a:ea typeface="Meiryo UI" panose="020B0604030504040204" pitchFamily="50" charset="-128"/>
+            </a:endParaRPr>
+          </a:p>
+          <a:p>
+            <a:pPr marL="742950" lvl="1" indent="-285750">
+              <a:buFont typeface="Arial" panose="020B0604020202020204" pitchFamily="34" charset="0"/>
+              <a:buChar char="•"/>
+            </a:pPr>
+            <a:r>
+              <a:rPr kumimoji="1" lang="ja-JP" altLang="en-US" sz="1100" dirty="0">
+                <a:solidFill>
+                  <a:schemeClr val="tx1"/>
+                </a:solidFill>
+                <a:latin typeface="Meiryo UI" panose="020B0604030504040204" pitchFamily="50" charset="-128"/>
+                <a:ea typeface="Meiryo UI" panose="020B0604030504040204" pitchFamily="50" charset="-128"/>
+              </a:rPr>
+              <a:t>ベンダ品質の尻拭い（指示・督促・手戻り）が恒常化し、企画業務への戦力シフトは実現しない</a:t>
+            </a:r>
+          </a:p>
+          <a:p>
+            <a:pPr marL="285750" indent="-285750">
+              <a:buFont typeface="Arial" panose="020B0604020202020204" pitchFamily="34" charset="0"/>
+              <a:buChar char="•"/>
+            </a:pPr>
+            <a:r>
+              <a:rPr kumimoji="1" lang="ja-JP" altLang="en-US" sz="1100" dirty="0">
+                <a:solidFill>
+                  <a:schemeClr val="tx1"/>
+                </a:solidFill>
+                <a:latin typeface="Meiryo UI" panose="020B0604030504040204" pitchFamily="50" charset="-128"/>
+                <a:ea typeface="Meiryo UI" panose="020B0604030504040204" pitchFamily="50" charset="-128"/>
+              </a:rPr>
+              <a:t>【実行した場合（投資対効果）】</a:t>
+            </a:r>
+          </a:p>
+          <a:p>
+            <a:pPr marL="742950" lvl="1" indent="-285750">
+              <a:buFont typeface="Arial" panose="020B0604020202020204" pitchFamily="34" charset="0"/>
+              <a:buChar char="•"/>
+            </a:pPr>
+            <a:r>
+              <a:rPr kumimoji="1" lang="ja-JP" altLang="en-US" sz="1100" dirty="0">
+                <a:solidFill>
+                  <a:schemeClr val="tx1"/>
+                </a:solidFill>
+                <a:latin typeface="Meiryo UI" panose="020B0604030504040204" pitchFamily="50" charset="-128"/>
+                <a:ea typeface="Meiryo UI" panose="020B0604030504040204" pitchFamily="50" charset="-128"/>
+              </a:rPr>
+              <a:t>投資：移管初期費用 約2,500万円（STEP1・FY26）＋Phase 0の当社工数・外部支援費（概算は別紙）</a:t>
+            </a:r>
+          </a:p>
+          <a:p>
+            <a:pPr marL="742950" lvl="1" indent="-285750">
+              <a:buFont typeface="Arial" panose="020B0604020202020204" pitchFamily="34" charset="0"/>
+              <a:buChar char="•"/>
+            </a:pPr>
+            <a:r>
+              <a:rPr kumimoji="1" lang="ja-JP" altLang="en-US" sz="1100" dirty="0">
+                <a:solidFill>
+                  <a:schemeClr val="tx1"/>
+                </a:solidFill>
+                <a:latin typeface="Meiryo UI" panose="020B0604030504040204" pitchFamily="50" charset="-128"/>
+                <a:ea typeface="Meiryo UI" panose="020B0604030504040204" pitchFamily="50" charset="-128"/>
+              </a:rPr>
+              <a:t>FY27：移管初期費用＋移管後運用費用は現行運用費用と同水準に収まる設計（Jカーブ）</a:t>
+            </a:r>
+          </a:p>
+          <a:p>
+            <a:pPr marL="742950" lvl="1" indent="-285750">
+              <a:buFont typeface="Arial" panose="020B0604020202020204" pitchFamily="34" charset="0"/>
+              <a:buChar char="•"/>
+            </a:pPr>
+            <a:r>
+              <a:rPr kumimoji="1" lang="ja-JP" altLang="en-US" sz="1100" dirty="0">
+                <a:solidFill>
+                  <a:schemeClr val="tx1"/>
+                </a:solidFill>
+                <a:latin typeface="Meiryo UI" panose="020B0604030504040204" pitchFamily="50" charset="-128"/>
+                <a:ea typeface="Meiryo UI" panose="020B0604030504040204" pitchFamily="50" charset="-128"/>
+              </a:rPr>
+              <a:t>FY28以降：委託費▲10〜20%（3年累計）が立ち上がり、社員2FTE（将来6〜7FTE）を企画業務へ再配置</a:t>
+            </a:r>
+          </a:p>
+          <a:p>
+            <a:pPr marL="742950" lvl="1" indent="-285750">
+              <a:buFont typeface="Arial" panose="020B0604020202020204" pitchFamily="34" charset="0"/>
+              <a:buChar char="•"/>
+            </a:pPr>
+            <a:r>
+              <a:rPr kumimoji="1" lang="ja-JP" altLang="en-US" sz="1100" dirty="0">
+                <a:solidFill>
+                  <a:schemeClr val="tx1"/>
+                </a:solidFill>
+                <a:latin typeface="Meiryo UI" panose="020B0604030504040204" pitchFamily="50" charset="-128"/>
+                <a:ea typeface="Meiryo UI" panose="020B0604030504040204" pitchFamily="50" charset="-128"/>
+              </a:rPr>
+              <a:t>リスク低減：属人ゼロ・SLAによる品質統制・監査証跡の仕組み化・24時間365日体制</a:t>
+            </a:r>
+          </a:p>
+          <a:p>
+            <a:pPr marL="285750" indent="-285750">
+              <a:buFont typeface="Arial" panose="020B0604020202020204" pitchFamily="34" charset="0"/>
+              <a:buChar char="•"/>
+            </a:pPr>
+            <a:r>
+              <a:rPr kumimoji="1" lang="ja-JP" altLang="en-US" sz="1100" dirty="0">
+                <a:solidFill>
+                  <a:schemeClr val="tx1"/>
+                </a:solidFill>
+                <a:latin typeface="Meiryo UI" panose="020B0604030504040204" pitchFamily="50" charset="-128"/>
+                <a:ea typeface="Meiryo UI" panose="020B0604030504040204" pitchFamily="50" charset="-128"/>
+              </a:rPr>
+              <a:t>【効果の担保】</a:t>
+            </a:r>
+          </a:p>
+          <a:p>
+            <a:pPr marL="742950" lvl="1" indent="-285750">
+              <a:buFont typeface="Arial" panose="020B0604020202020204" pitchFamily="34" charset="0"/>
+              <a:buChar char="•"/>
+            </a:pPr>
+            <a:r>
+              <a:rPr kumimoji="1" lang="ja-JP" altLang="en-US" sz="1100" dirty="0">
+                <a:solidFill>
+                  <a:schemeClr val="tx1"/>
+                </a:solidFill>
+                <a:latin typeface="Meiryo UI" panose="020B0604030504040204" pitchFamily="50" charset="-128"/>
+                <a:ea typeface="Meiryo UI" panose="020B0604030504040204" pitchFamily="50" charset="-128"/>
+              </a:rPr>
+              <a:t>数字はすべてPhase 0ベースライン（当社実測）から毎年経営へ報告。ベンダ試算に依存しない</a:t>
+            </a:r>
+            <a:r>
+              <a:rPr kumimoji="1" lang="en-US" altLang="ja-JP" sz="1100" dirty="0">
+                <a:solidFill>
+                  <a:schemeClr val="tx1"/>
+                </a:solidFill>
+                <a:latin typeface="Meiryo UI" panose="020B0604030504040204" pitchFamily="50" charset="-128"/>
+                <a:ea typeface="Meiryo UI" panose="020B0604030504040204" pitchFamily="50" charset="-128"/>
+              </a:rPr>
+              <a:t/>
+            </a:r>
+            <a:r>
+              <a:rPr kumimoji="1" lang="ja-JP" altLang="en-US" sz="1100" dirty="0">
+                <a:solidFill>
+                  <a:schemeClr val="tx1"/>
+                </a:solidFill>
+                <a:latin typeface="Meiryo UI" panose="020B0604030504040204" pitchFamily="50" charset="-128"/>
+                <a:ea typeface="Meiryo UI" panose="020B0604030504040204" pitchFamily="50" charset="-128"/>
+              </a:rPr>
+              <a:t/>
+            </a:r>
+            <a:r>
+              <a:rPr kumimoji="1" lang="en-US" altLang="ja-JP" sz="1100" dirty="0">
+                <a:solidFill>
+                  <a:schemeClr val="tx1"/>
+                </a:solidFill>
+                <a:latin typeface="Meiryo UI" panose="020B0604030504040204" pitchFamily="50" charset="-128"/>
+                <a:ea typeface="Meiryo UI" panose="020B0604030504040204" pitchFamily="50" charset="-128"/>
+              </a:rPr>
+              <a:t/>
+            </a:r>
+            <a:r>
+              <a:rPr kumimoji="1" lang="ja-JP" altLang="en-US" sz="1100" dirty="0">
+                <a:solidFill>
+                  <a:schemeClr val="tx1"/>
+                </a:solidFill>
+                <a:latin typeface="Meiryo UI" panose="020B0604030504040204" pitchFamily="50" charset="-128"/>
+                <a:ea typeface="Meiryo UI" panose="020B0604030504040204" pitchFamily="50" charset="-128"/>
+              </a:rPr>
+              <a:t/>
+            </a:r>
+          </a:p>
+          <a:p>
+            <a:pPr marL="742950" lvl="1" indent="-285750">
+              <a:buFont typeface="Arial" panose="020B0604020202020204" pitchFamily="34" charset="0"/>
+              <a:buChar char="•"/>
+            </a:pPr>
+            <a:r>
+              <a:rPr kumimoji="1" lang="ja-JP" altLang="en-US" sz="1100" dirty="0">
+                <a:solidFill>
+                  <a:schemeClr val="tx1"/>
+                </a:solidFill>
+                <a:latin typeface="Meiryo UI" panose="020B0604030504040204" pitchFamily="50" charset="-128"/>
+                <a:ea typeface="Meiryo UI" panose="020B0604030504040204" pitchFamily="50" charset="-128"/>
+              </a:rPr>
+              <a:t>※金額はベンダ提示値・当社仮置き値による概算。Phase 0（9〜10月）で実数化</a:t>
+            </a:r>
+          </a:p>
+          <a:p>
+            <a:pPr marL="285750" indent="-285750">
+              <a:buFont typeface="Arial" panose="020B0604020202020204" pitchFamily="34" charset="0"/>
+              <a:buChar char="•"/>
+            </a:pPr>
+            <a:r>
+              <a:rPr kumimoji="1" lang="ja-JP" altLang="en-US" sz="1100" dirty="0">
+                <a:solidFill>
+                  <a:schemeClr val="tx1"/>
+                </a:solidFill>
+                <a:latin typeface="Meiryo UI" panose="020B0604030504040204" pitchFamily="50" charset="-128"/>
+                <a:ea typeface="Meiryo UI" panose="020B0604030504040204" pitchFamily="50" charset="-128"/>
+              </a:rPr>
+              <a:t/>
+            </a:r>
+          </a:p>
+          <a:p>
+            <a:pPr marL="285750" indent="-285750">
+              <a:buFont typeface="Arial" panose="020B0604020202020204" pitchFamily="34" charset="0"/>
+              <a:buChar char="•"/>
+            </a:pPr>
+            <a:r>
+              <a:rPr kumimoji="1" lang="ja-JP" altLang="en-US" sz="1100" dirty="0">
+                <a:solidFill>
+                  <a:schemeClr val="tx1"/>
+                </a:solidFill>
+                <a:latin typeface="Meiryo UI" panose="020B0604030504040204" pitchFamily="50" charset="-128"/>
+                <a:ea typeface="Meiryo UI" panose="020B0604030504040204" pitchFamily="50" charset="-128"/>
+              </a:rPr>
+              <a:t/>
+            </a:r>
+            <a:r>
+              <a:rPr kumimoji="1" lang="en-US" altLang="ja-JP" sz="1100" dirty="0">
+                <a:solidFill>
+                  <a:schemeClr val="tx1"/>
+                </a:solidFill>
+                <a:latin typeface="Meiryo UI" panose="020B0604030504040204" pitchFamily="50" charset="-128"/>
+                <a:ea typeface="Meiryo UI" panose="020B0604030504040204" pitchFamily="50" charset="-128"/>
+              </a:rPr>
+              <a:t/>
+            </a:r>
+            <a:r>
+              <a:rPr kumimoji="1" lang="ja-JP" altLang="en-US" sz="1100" dirty="0">
+                <a:solidFill>
+                  <a:schemeClr val="tx1"/>
+                </a:solidFill>
+                <a:latin typeface="Meiryo UI" panose="020B0604030504040204" pitchFamily="50" charset="-128"/>
+                <a:ea typeface="Meiryo UI" panose="020B0604030504040204" pitchFamily="50" charset="-128"/>
+              </a:rPr>
+              <a:t/>
+            </a:r>
+          </a:p>
+          <a:p>
+            <a:pPr marL="285750" indent="-285750">
+              <a:buFont typeface="Arial" panose="020B0604020202020204" pitchFamily="34" charset="0"/>
+              <a:buChar char="•"/>
+            </a:pPr>
+            <a:r>
+              <a:rPr kumimoji="1" lang="ja-JP" altLang="en-US" sz="1100" dirty="0">
+                <a:solidFill>
+                  <a:schemeClr val="tx1"/>
+                </a:solidFill>
+                <a:latin typeface="Meiryo UI" panose="020B0604030504040204" pitchFamily="50" charset="-128"/>
+                <a:ea typeface="Meiryo UI" panose="020B0604030504040204" pitchFamily="50" charset="-128"/>
+              </a:rPr>
+              <a:t/>
+            </a:r>
+            <a:r>
+              <a:rPr kumimoji="1" lang="en-US" altLang="ja-JP" sz="1100" dirty="0">
+                <a:solidFill>
+                  <a:schemeClr val="tx1"/>
+                </a:solidFill>
+                <a:latin typeface="Meiryo UI" panose="020B0604030504040204" pitchFamily="50" charset="-128"/>
+                <a:ea typeface="Meiryo UI" panose="020B0604030504040204" pitchFamily="50" charset="-128"/>
+              </a:rPr>
+              <a:t/>
+            </a:r>
+            <a:r>
+              <a:rPr kumimoji="1" lang="ja-JP" altLang="en-US" sz="1100" dirty="0">
+                <a:solidFill>
+                  <a:schemeClr val="tx1"/>
+                </a:solidFill>
+                <a:latin typeface="Meiryo UI" panose="020B0604030504040204" pitchFamily="50" charset="-128"/>
+                <a:ea typeface="Meiryo UI" panose="020B0604030504040204" pitchFamily="50" charset="-128"/>
+              </a:rPr>
+              <a:t/>
+            </a:r>
+          </a:p>
+          <a:p>
+            <a:pPr marL="285750" indent="-285750">
+              <a:buFont typeface="Arial" panose="020B0604020202020204" pitchFamily="34" charset="0"/>
+              <a:buChar char="•"/>
+            </a:pPr>
+            <a:r>
+              <a:rPr kumimoji="1" lang="ja-JP" altLang="en-US" sz="1100" dirty="0">
+                <a:solidFill>
+                  <a:schemeClr val="tx1"/>
+                </a:solidFill>
+                <a:latin typeface="Meiryo UI" panose="020B0604030504040204" pitchFamily="50" charset="-128"/>
+                <a:ea typeface="Meiryo UI" panose="020B0604030504040204" pitchFamily="50" charset="-128"/>
+              </a:rPr>
+              <a:t/>
+            </a:r>
+            <a:r>
+              <a:rPr kumimoji="1" lang="en-US" altLang="ja-JP" sz="1100" dirty="0">
+                <a:solidFill>
+                  <a:schemeClr val="tx1"/>
+                </a:solidFill>
+                <a:latin typeface="Meiryo UI" panose="020B0604030504040204" pitchFamily="50" charset="-128"/>
+                <a:ea typeface="Meiryo UI" panose="020B0604030504040204" pitchFamily="50" charset="-128"/>
+              </a:rPr>
+              <a:t/>
+            </a:r>
+            <a:r>
+              <a:rPr kumimoji="1" lang="ja-JP" altLang="en-US" sz="1100" dirty="0">
+                <a:solidFill>
+                  <a:schemeClr val="tx1"/>
+                </a:solidFill>
+                <a:latin typeface="Meiryo UI" panose="020B0604030504040204" pitchFamily="50" charset="-128"/>
+                <a:ea typeface="Meiryo UI" panose="020B0604030504040204" pitchFamily="50" charset="-128"/>
+              </a:rPr>
+              <a:t/>
+            </a:r>
+          </a:p>
+          <a:p>
+            <a:pPr marL="285750" indent="-285750">
+              <a:buFont typeface="Arial" panose="020B0604020202020204" pitchFamily="34" charset="0"/>
+              <a:buChar char="•"/>
+            </a:pPr>
+            <a:r>
+              <a:rPr kumimoji="1" lang="ja-JP" altLang="en-US" sz="1100" dirty="0">
+                <a:solidFill>
+                  <a:schemeClr val="tx1"/>
+                </a:solidFill>
+                <a:latin typeface="Meiryo UI" panose="020B0604030504040204" pitchFamily="50" charset="-128"/>
+                <a:ea typeface="Meiryo UI" panose="020B0604030504040204" pitchFamily="50" charset="-128"/>
+              </a:rPr>
+              <a:t/>
+            </a:r>
+          </a:p>
+          <a:p>
+            <a:pPr marL="285750" indent="-285750">
+              <a:buFont typeface="Arial" panose="020B0604020202020204" pitchFamily="34" charset="0"/>
+              <a:buChar char="•"/>
+            </a:pPr>
+            <a:r>
+              <a:rPr kumimoji="1" lang="ja-JP" altLang="en-US" sz="1100" dirty="0">
+                <a:solidFill>
+                  <a:schemeClr val="tx1"/>
+                </a:solidFill>
+                <a:latin typeface="Meiryo UI" panose="020B0604030504040204" pitchFamily="50" charset="-128"/>
+                <a:ea typeface="Meiryo UI" panose="020B0604030504040204" pitchFamily="50" charset="-128"/>
+              </a:rPr>
+              <a:t/>
+            </a:r>
+          </a:p>
+          <a:p>
+            <a:pPr marL="285750" indent="-285750">
+              <a:buFont typeface="Arial" panose="020B0604020202020204" pitchFamily="34" charset="0"/>
+              <a:buChar char="•"/>
+            </a:pPr>
+            <a:r>
+              <a:rPr kumimoji="1" lang="ja-JP" altLang="en-US" sz="1100" dirty="0">
+                <a:solidFill>
+                  <a:schemeClr val="tx1"/>
+                </a:solidFill>
+                <a:latin typeface="Meiryo UI" panose="020B0604030504040204" pitchFamily="50" charset="-128"/>
+                <a:ea typeface="Meiryo UI" panose="020B0604030504040204" pitchFamily="50" charset="-128"/>
+              </a:rPr>
+              <a:t/>
+            </a:r>
+            <a:endParaRPr kumimoji="1" lang="en-US" altLang="ja-JP" sz="1100" dirty="0">
+              <a:solidFill>
+                <a:schemeClr val="tx1"/>
+              </a:solidFill>
+              <a:latin typeface="Meiryo UI" panose="020B0604030504040204" pitchFamily="50" charset="-128"/>
+              <a:ea typeface="Meiryo UI" panose="020B0604030504040204" pitchFamily="50" charset="-128"/>
+            </a:endParaRPr>
+          </a:p>
+          <a:p>
+            <a:pPr marL="285750" indent="-285750">
+              <a:buFont typeface="Arial" panose="020B0604020202020204" pitchFamily="34" charset="0"/>
+              <a:buChar char="•"/>
+            </a:pPr>
+            <a:r>
+              <a:rPr lang="ja-JP" altLang="en-US" sz="1100" dirty="0">
+                <a:solidFill>
+                  <a:schemeClr val="tx1"/>
+                </a:solidFill>
+                <a:latin typeface="Meiryo UI" panose="020B0604030504040204" pitchFamily="50" charset="-128"/>
+                <a:ea typeface="Meiryo UI" panose="020B0604030504040204" pitchFamily="50" charset="-128"/>
+              </a:rPr>
+              <a:t/>
+            </a:r>
+            <a:endParaRPr lang="en-US" altLang="ja-JP" sz="1100" dirty="0">
+              <a:solidFill>
+                <a:schemeClr val="tx1"/>
+              </a:solidFill>
+              <a:latin typeface="Meiryo UI" panose="020B0604030504040204" pitchFamily="50" charset="-128"/>
+              <a:ea typeface="Meiryo UI" panose="020B0604030504040204" pitchFamily="50" charset="-128"/>
+            </a:endParaRPr>
+          </a:p>
+          <a:p>
+            <a:pPr marL="742950" lvl="1" indent="-285750">
+              <a:buFont typeface="Arial" panose="020B0604020202020204" pitchFamily="34" charset="0"/>
+              <a:buChar char="•"/>
+            </a:pPr>
+            <a:r>
+              <a:rPr lang="ja-JP" altLang="en-US" sz="1100" dirty="0">
+                <a:solidFill>
+                  <a:schemeClr val="tx1"/>
+                </a:solidFill>
+                <a:latin typeface="Meiryo UI" panose="020B0604030504040204" pitchFamily="50" charset="-128"/>
+                <a:ea typeface="Meiryo UI" panose="020B0604030504040204" pitchFamily="50" charset="-128"/>
+              </a:rPr>
+              <a:t/>
+            </a:r>
+            <a:endParaRPr lang="en-US" altLang="ja-JP" sz="1100" dirty="0">
+              <a:solidFill>
+                <a:schemeClr val="tx1"/>
+              </a:solidFill>
+              <a:latin typeface="Meiryo UI" panose="020B0604030504040204" pitchFamily="50" charset="-128"/>
+              <a:ea typeface="Meiryo UI" panose="020B0604030504040204" pitchFamily="50" charset="-128"/>
+            </a:endParaRPr>
+          </a:p>
+          <a:p>
+            <a:pPr marL="285750" indent="-285750">
+              <a:buFont typeface="Arial" panose="020B0604020202020204" pitchFamily="34" charset="0"/>
+              <a:buChar char="•"/>
+            </a:pPr>
+            <a:r>
+              <a:rPr lang="en-US" altLang="ja-JP" sz="1100" dirty="0">
+                <a:solidFill>
+                  <a:schemeClr val="tx1"/>
+                </a:solidFill>
+                <a:latin typeface="Meiryo UI" panose="020B0604030504040204" pitchFamily="50" charset="-128"/>
+                <a:ea typeface="Meiryo UI" panose="020B0604030504040204" pitchFamily="50" charset="-128"/>
+              </a:rPr>
+              <a:t/>
+            </a:r>
+          </a:p>
+        </p:txBody>
+      </p:sp>
+    </p:spTree>
+    <p:extLst>
+      <p:ext uri="{BB962C8B-B14F-4D97-AF65-F5344CB8AC3E}">
+        <p14:creationId xmlns:p14="http://schemas.microsoft.com/office/powerpoint/2010/main" val="2701157942"/>
+      </p:ext>
+    </p:extLst>
+  </p:cSld>
+  <p:clrMapOvr>
+    <a:masterClrMapping/>
+  </p:clrMapOvr>
+</p:sld>
+</file>
+
+<file path=ppt/slides/slide12.xml><?xml version="1.0" encoding="utf-8"?>
+<p:sld xmlns:a="http://schemas.openxmlformats.org/drawingml/2006/main" xmlns:r="http://schemas.openxmlformats.org/officeDocument/2006/relationships" xmlns:p="http://schemas.openxmlformats.org/presentationml/2006/main">
+  <p:cSld>
+    <p:spTree>
+      <p:nvGrpSpPr>
+        <p:cNvPr id="1" name=""/>
+        <p:cNvGrpSpPr/>
+        <p:nvPr/>
+      </p:nvGrpSpPr>
+      <p:grpSpPr>
+        <a:xfrm>
+          <a:off x="0" y="0"/>
+          <a:ext cx="0" cy="0"/>
+          <a:chOff x="0" y="0"/>
+          <a:chExt cx="0" cy="0"/>
+        </a:xfrm>
+      </p:grpSpPr>
+      <p:sp>
+        <p:nvSpPr>
+          <p:cNvPr id="2" name="タイトル 1">
+            <a:extLst>
+              <a:ext uri="{FF2B5EF4-FFF2-40B4-BE49-F238E27FC236}">
+                <a16:creationId xmlns:a16="http://schemas.microsoft.com/office/drawing/2014/main" id="{3A9DF23B-BA22-10F6-2EAF-BAA812C01C4E}"/>
+              </a:ext>
+            </a:extLst>
+          </p:cNvPr>
+          <p:cNvSpPr>
+            <a:spLocks noGrp="1"/>
+          </p:cNvSpPr>
+          <p:nvPr>
+            <p:ph type="title"/>
+          </p:nvPr>
+        </p:nvSpPr>
+        <p:spPr/>
+        <p:txBody>
+          <a:bodyPr/>
+          <a:lstStyle/>
+          <a:p>
+            <a:r>
+              <a:rPr lang="en-US" altLang="ja-JP" dirty="0"/>
+              <a:t>主要リスクと対応</a:t>
+            </a:r>
+            <a:br>
+              <a:rPr lang="en-US" altLang="ja-JP" dirty="0"/>
+            </a:br>
+            <a:r>
+              <a:rPr lang="ja-JP" altLang="en-US" dirty="0"/>
+              <a:t/>
+            </a:r>
+            <a:endParaRPr kumimoji="1" lang="ja-JP" altLang="en-US" dirty="0"/>
+          </a:p>
+        </p:txBody>
+      </p:sp>
+      <p:sp>
+        <p:nvSpPr>
+          <p:cNvPr id="3" name="テキスト プレースホルダー 2">
+            <a:extLst>
+              <a:ext uri="{FF2B5EF4-FFF2-40B4-BE49-F238E27FC236}">
+                <a16:creationId xmlns:a16="http://schemas.microsoft.com/office/drawing/2014/main" id="{2AFD4DED-D640-BD1D-F8CD-28521C342DA3}"/>
+              </a:ext>
+            </a:extLst>
+          </p:cNvPr>
+          <p:cNvSpPr>
+            <a:spLocks noGrp="1"/>
+          </p:cNvSpPr>
+          <p:nvPr>
+            <p:ph type="body" sz="quarter" idx="13"/>
+          </p:nvPr>
+        </p:nvSpPr>
+        <p:spPr/>
+        <p:txBody>
+          <a:bodyPr/>
+          <a:lstStyle/>
+          <a:p>
+            <a:r>
+              <a:rPr lang="ja-JP" altLang="en-US" dirty="0"/>
+              <a:t>リスクは「あるか」ではなく「統制できるか」— 5つの主要リスクすべてに事前の対応策と引き金を定義済み</a:t>
+            </a:r>
+            <a:endParaRPr lang="en-US" altLang="ja-JP" dirty="0"/>
+          </a:p>
+        </p:txBody>
+      </p:sp>
+      <p:sp>
+        <p:nvSpPr>
+          <p:cNvPr id="4" name="正方形/長方形 3">
+            <a:extLst>
+              <a:ext uri="{FF2B5EF4-FFF2-40B4-BE49-F238E27FC236}">
+                <a16:creationId xmlns:a16="http://schemas.microsoft.com/office/drawing/2014/main" id="{790EBD07-8EFA-8601-EF01-DC465479B26E}"/>
+              </a:ext>
+            </a:extLst>
+          </p:cNvPr>
+          <p:cNvSpPr/>
+          <p:nvPr/>
+        </p:nvSpPr>
+        <p:spPr>
+          <a:xfrm>
+            <a:off x="334963" y="1628775"/>
+            <a:ext cx="11522075" cy="4679950"/>
+          </a:xfrm>
+          <a:prstGeom prst="rect">
+            <a:avLst/>
+          </a:prstGeom>
+          <a:solidFill>
+            <a:schemeClr val="accent6">
+              <a:lumMod val="20000"/>
+              <a:lumOff val="80000"/>
+            </a:schemeClr>
+          </a:solidFill>
+          <a:ln w="3175">
+            <a:noFill/>
+          </a:ln>
+          <a:effectLst/>
+        </p:spPr>
+        <p:style>
+          <a:lnRef idx="1">
+            <a:schemeClr val="accent1"/>
+          </a:lnRef>
+          <a:fillRef idx="3">
+            <a:schemeClr val="accent1"/>
+          </a:fillRef>
+          <a:effectRef idx="2">
+            <a:schemeClr val="accent1"/>
+          </a:effectRef>
+          <a:fontRef idx="minor">
+            <a:schemeClr val="lt1"/>
+          </a:fontRef>
+        </p:style>
+        <p:txBody>
+          <a:bodyPr rot="0" spcFirstLastPara="0" vertOverflow="overflow" horzOverflow="overflow" vert="horz" wrap="square" lIns="36000" tIns="36000" rIns="36000" bIns="36000" numCol="1" spcCol="0" rtlCol="0" fromWordArt="0" anchor="t" anchorCtr="0" forceAA="0" compatLnSpc="1">
+            <a:prstTxWarp prst="textNoShape">
+              <a:avLst/>
+            </a:prstTxWarp>
+            <a:noAutofit/>
+          </a:bodyPr>
+          <a:lstStyle/>
+          <a:p>
+            <a:pPr marL="285750" indent="-285750">
+              <a:buFont typeface="Arial" panose="020B0604020202020204" pitchFamily="34" charset="0"/>
+              <a:buChar char="•"/>
+            </a:pPr>
+            <a:r>
+              <a:rPr kumimoji="1" lang="ja-JP" altLang="en-US" sz="1100" dirty="0">
+                <a:solidFill>
+                  <a:schemeClr val="tx1"/>
+                </a:solidFill>
+                <a:latin typeface="Meiryo UI" panose="020B0604030504040204" pitchFamily="50" charset="-128"/>
+                <a:ea typeface="Meiryo UI" panose="020B0604030504040204" pitchFamily="50" charset="-128"/>
+              </a:rPr>
+              <a:t>① 移管期の品質低下・障害</a:t>
+            </a:r>
+          </a:p>
+          <a:p>
+            <a:pPr marL="742950" lvl="1" indent="-285750">
+              <a:buFont typeface="Arial" panose="020B0604020202020204" pitchFamily="34" charset="0"/>
+              <a:buChar char="•"/>
+            </a:pPr>
+            <a:r>
+              <a:rPr kumimoji="1" lang="ja-JP" altLang="en-US" sz="1100" dirty="0">
+                <a:solidFill>
+                  <a:schemeClr val="tx1"/>
+                </a:solidFill>
+                <a:latin typeface="Meiryo UI" panose="020B0604030504040204" pitchFamily="50" charset="-128"/>
+                <a:ea typeface="Meiryo UI" panose="020B0604030504040204" pitchFamily="50" charset="-128"/>
+              </a:rPr>
+              <a:t>→ 完了判定基準（Exit Criteria）は当社/LEBが保持。単独運転試験2週間・現行ベンダの伴走（1〜2ヶ月・有償）・ロールバック基準を事前定義</a:t>
+            </a:r>
+            <a:r>
+              <a:rPr kumimoji="1" lang="en-US" altLang="ja-JP" sz="1100" dirty="0">
+                <a:solidFill>
+                  <a:schemeClr val="tx1"/>
+                </a:solidFill>
+                <a:latin typeface="Meiryo UI" panose="020B0604030504040204" pitchFamily="50" charset="-128"/>
+                <a:ea typeface="Meiryo UI" panose="020B0604030504040204" pitchFamily="50" charset="-128"/>
+              </a:rPr>
+              <a:t/>
+            </a:r>
+            <a:r>
+              <a:rPr kumimoji="1" lang="ja-JP" altLang="en-US" sz="1100" dirty="0">
+                <a:solidFill>
+                  <a:schemeClr val="tx1"/>
+                </a:solidFill>
+                <a:latin typeface="Meiryo UI" panose="020B0604030504040204" pitchFamily="50" charset="-128"/>
+                <a:ea typeface="Meiryo UI" panose="020B0604030504040204" pitchFamily="50" charset="-128"/>
+              </a:rPr>
+              <a:t/>
+            </a:r>
+            <a:r>
+              <a:rPr kumimoji="1" lang="en-US" altLang="ja-JP" sz="1100" dirty="0">
+                <a:solidFill>
+                  <a:schemeClr val="tx1"/>
+                </a:solidFill>
+                <a:latin typeface="Meiryo UI" panose="020B0604030504040204" pitchFamily="50" charset="-128"/>
+                <a:ea typeface="Meiryo UI" panose="020B0604030504040204" pitchFamily="50" charset="-128"/>
+              </a:rPr>
+              <a:t/>
+            </a:r>
+            <a:r>
+              <a:rPr kumimoji="1" lang="ja-JP" altLang="en-US" sz="1100" dirty="0">
+                <a:solidFill>
+                  <a:schemeClr val="tx1"/>
+                </a:solidFill>
+                <a:latin typeface="Meiryo UI" panose="020B0604030504040204" pitchFamily="50" charset="-128"/>
+                <a:ea typeface="Meiryo UI" panose="020B0604030504040204" pitchFamily="50" charset="-128"/>
+              </a:rPr>
+              <a:t/>
+            </a:r>
+            <a:endParaRPr kumimoji="1" lang="en-US" altLang="ja-JP" sz="1100" dirty="0">
+              <a:solidFill>
+                <a:schemeClr val="tx1"/>
+              </a:solidFill>
+              <a:latin typeface="Meiryo UI" panose="020B0604030504040204" pitchFamily="50" charset="-128"/>
+              <a:ea typeface="Meiryo UI" panose="020B0604030504040204" pitchFamily="50" charset="-128"/>
+            </a:endParaRPr>
+          </a:p>
+          <a:p>
+            <a:pPr marL="285750" indent="-285750">
+              <a:buFont typeface="Arial" panose="020B0604020202020204" pitchFamily="34" charset="0"/>
+              <a:buChar char="•"/>
+            </a:pPr>
+            <a:r>
+              <a:rPr kumimoji="1" lang="ja-JP" altLang="en-US" sz="1100" dirty="0">
+                <a:solidFill>
+                  <a:schemeClr val="tx1"/>
+                </a:solidFill>
+                <a:latin typeface="Meiryo UI" panose="020B0604030504040204" pitchFamily="50" charset="-128"/>
+                <a:ea typeface="Meiryo UI" panose="020B0604030504040204" pitchFamily="50" charset="-128"/>
+              </a:rPr>
+              <a:t>② 現行ベンダの非協力・キーマン離脱</a:t>
+            </a:r>
+          </a:p>
+          <a:p>
+            <a:pPr marL="742950" lvl="1" indent="-285750">
+              <a:buFont typeface="Arial" panose="020B0604020202020204" pitchFamily="34" charset="0"/>
+              <a:buChar char="•"/>
+            </a:pPr>
+            <a:r>
+              <a:rPr kumimoji="1" lang="ja-JP" altLang="en-US" sz="1100" dirty="0">
+                <a:solidFill>
+                  <a:schemeClr val="tx1"/>
+                </a:solidFill>
+                <a:latin typeface="Meiryo UI" panose="020B0604030504040204" pitchFamily="50" charset="-128"/>
+                <a:ea typeface="Meiryo UI" panose="020B0604030504040204" pitchFamily="50" charset="-128"/>
+              </a:rPr>
+              <a:t>→ 引継ぎ協力義務の契約確認（今すぐ）・引継ぎ品質と検収/支払いの連動・属人業務からの優先引継ぎ</a:t>
+            </a:r>
+            <a:endParaRPr kumimoji="1" lang="en-US" altLang="ja-JP" sz="1100" dirty="0">
+              <a:solidFill>
+                <a:schemeClr val="tx1"/>
+              </a:solidFill>
+              <a:latin typeface="Meiryo UI" panose="020B0604030504040204" pitchFamily="50" charset="-128"/>
+              <a:ea typeface="Meiryo UI" panose="020B0604030504040204" pitchFamily="50" charset="-128"/>
+            </a:endParaRPr>
+          </a:p>
+          <a:p>
+            <a:pPr marL="285750" indent="-285750">
+              <a:buFont typeface="Arial" panose="020B0604020202020204" pitchFamily="34" charset="0"/>
+              <a:buChar char="•"/>
+            </a:pPr>
+            <a:r>
+              <a:rPr kumimoji="1" lang="ja-JP" altLang="en-US" sz="1100" dirty="0">
+                <a:solidFill>
+                  <a:schemeClr val="tx1"/>
+                </a:solidFill>
+                <a:latin typeface="Meiryo UI" panose="020B0604030504040204" pitchFamily="50" charset="-128"/>
+                <a:ea typeface="Meiryo UI" panose="020B0604030504040204" pitchFamily="50" charset="-128"/>
+              </a:rPr>
+              <a:t>③ 中国有事・データ規制</a:t>
+            </a:r>
+          </a:p>
+          <a:p>
+            <a:pPr marL="742950" lvl="1" indent="-285750">
+              <a:buFont typeface="Arial" panose="020B0604020202020204" pitchFamily="34" charset="0"/>
+              <a:buChar char="•"/>
+            </a:pPr>
+            <a:r>
+              <a:rPr kumimoji="1" lang="ja-JP" altLang="en-US" sz="1100" dirty="0">
+                <a:solidFill>
+                  <a:schemeClr val="tx1"/>
+                </a:solidFill>
+                <a:latin typeface="Meiryo UI" panose="020B0604030504040204" pitchFamily="50" charset="-128"/>
+                <a:ea typeface="Meiryo UI" panose="020B0604030504040204" pitchFamily="50" charset="-128"/>
+              </a:rPr>
+              <a:t>→ データ分類で機密・個人情報は国内/ニアショア限定。有事のフェーズ対応を契約添付・3ヶ月単位契約（詳細は想定質問②）</a:t>
+            </a:r>
+          </a:p>
+          <a:p>
+            <a:pPr marL="285750" indent="-285750">
+              <a:buFont typeface="Arial" panose="020B0604020202020204" pitchFamily="34" charset="0"/>
+              <a:buChar char="•"/>
+            </a:pPr>
+            <a:r>
+              <a:rPr kumimoji="1" lang="ja-JP" altLang="en-US" sz="1100" dirty="0">
+                <a:solidFill>
+                  <a:schemeClr val="tx1"/>
+                </a:solidFill>
+                <a:latin typeface="Meiryo UI" panose="020B0604030504040204" pitchFamily="50" charset="-128"/>
+                <a:ea typeface="Meiryo UI" panose="020B0604030504040204" pitchFamily="50" charset="-128"/>
+              </a:rPr>
+              <a:t>④ LEBの統制能力</a:t>
+            </a:r>
+          </a:p>
+          <a:p>
+            <a:pPr marL="742950" lvl="1" indent="-285750">
+              <a:buFont typeface="Arial" panose="020B0604020202020204" pitchFamily="34" charset="0"/>
+              <a:buChar char="•"/>
+            </a:pPr>
+            <a:r>
+              <a:rPr kumimoji="1" lang="ja-JP" altLang="en-US" sz="1100" dirty="0">
+                <a:solidFill>
+                  <a:schemeClr val="tx1"/>
+                </a:solidFill>
+                <a:latin typeface="Meiryo UI" panose="020B0604030504040204" pitchFamily="50" charset="-128"/>
+                <a:ea typeface="Meiryo UI" panose="020B0604030504040204" pitchFamily="50" charset="-128"/>
+              </a:rPr>
+              <a:t>→ Phase 0で能力評価し、本体出向＋外部専門家登用で立ち上げ。STEP1完了時点でSLA監視・検収を実施できる状態に</a:t>
+            </a:r>
+          </a:p>
+          <a:p>
+            <a:pPr marL="285750" indent="-285750">
+              <a:buFont typeface="Arial" panose="020B0604020202020204" pitchFamily="34" charset="0"/>
+              <a:buChar char="•"/>
+            </a:pPr>
+            <a:r>
+              <a:rPr kumimoji="1" lang="ja-JP" altLang="en-US" sz="1100" dirty="0">
+                <a:solidFill>
+                  <a:schemeClr val="tx1"/>
+                </a:solidFill>
+                <a:latin typeface="Meiryo UI" panose="020B0604030504040204" pitchFamily="50" charset="-128"/>
+                <a:ea typeface="Meiryo UI" panose="020B0604030504040204" pitchFamily="50" charset="-128"/>
+              </a:rPr>
+              <a:t>⑤ 効果未達（ベンダ試算との乖離）</a:t>
+            </a:r>
+          </a:p>
+          <a:p>
+            <a:pPr marL="742950" lvl="1" indent="-285750">
+              <a:buFont typeface="Arial" panose="020B0604020202020204" pitchFamily="34" charset="0"/>
+              <a:buChar char="•"/>
+            </a:pPr>
+            <a:r>
+              <a:rPr kumimoji="1" lang="ja-JP" altLang="en-US" sz="1100" dirty="0">
+                <a:solidFill>
+                  <a:schemeClr val="tx1"/>
+                </a:solidFill>
+                <a:latin typeface="Meiryo UI" panose="020B0604030504040204" pitchFamily="50" charset="-128"/>
+                <a:ea typeface="Meiryo UI" panose="020B0604030504040204" pitchFamily="50" charset="-128"/>
+              </a:rPr>
+              <a:t>→ ベースライン合意書・SLA未達クレジット・各ゲートでの継続/中止判断</a:t>
+            </a:r>
+          </a:p>
+          <a:p>
+            <a:pPr marL="285750" indent="-285750">
+              <a:buFont typeface="Arial" panose="020B0604020202020204" pitchFamily="34" charset="0"/>
+              <a:buChar char="•"/>
+            </a:pPr>
+            <a:r>
+              <a:rPr kumimoji="1" lang="ja-JP" altLang="en-US" sz="1100" dirty="0">
+                <a:solidFill>
+                  <a:schemeClr val="tx1"/>
+                </a:solidFill>
+                <a:latin typeface="Meiryo UI" panose="020B0604030504040204" pitchFamily="50" charset="-128"/>
+                <a:ea typeface="Meiryo UI" panose="020B0604030504040204" pitchFamily="50" charset="-128"/>
+              </a:rPr>
+              <a:t>【リスク運営】</a:t>
+            </a:r>
+          </a:p>
+          <a:p>
+            <a:pPr marL="742950" lvl="1" indent="-285750">
+              <a:buFont typeface="Arial" panose="020B0604020202020204" pitchFamily="34" charset="0"/>
+              <a:buChar char="•"/>
+            </a:pPr>
+            <a:r>
+              <a:rPr kumimoji="1" lang="ja-JP" altLang="en-US" sz="1100" dirty="0">
+                <a:solidFill>
+                  <a:schemeClr val="tx1"/>
+                </a:solidFill>
+                <a:latin typeface="Meiryo UI" panose="020B0604030504040204" pitchFamily="50" charset="-128"/>
+                <a:ea typeface="Meiryo UI" panose="020B0604030504040204" pitchFamily="50" charset="-128"/>
+              </a:rPr>
+              <a:t>→ リスクレジスタは移管PMOが週次更新。「高」評価リスクは契約（10月末）前に対策実装の完了を条件とする</a:t>
+            </a:r>
+            <a:r>
+              <a:rPr kumimoji="1" lang="en-US" altLang="ja-JP" sz="1100" dirty="0">
+                <a:solidFill>
+                  <a:schemeClr val="tx1"/>
+                </a:solidFill>
+                <a:latin typeface="Meiryo UI" panose="020B0604030504040204" pitchFamily="50" charset="-128"/>
+                <a:ea typeface="Meiryo UI" panose="020B0604030504040204" pitchFamily="50" charset="-128"/>
+              </a:rPr>
+              <a:t/>
+            </a:r>
+            <a:r>
+              <a:rPr kumimoji="1" lang="ja-JP" altLang="en-US" sz="1100" dirty="0">
+                <a:solidFill>
+                  <a:schemeClr val="tx1"/>
+                </a:solidFill>
+                <a:latin typeface="Meiryo UI" panose="020B0604030504040204" pitchFamily="50" charset="-128"/>
+                <a:ea typeface="Meiryo UI" panose="020B0604030504040204" pitchFamily="50" charset="-128"/>
+              </a:rPr>
+              <a:t/>
+            </a:r>
+            <a:r>
+              <a:rPr kumimoji="1" lang="en-US" altLang="ja-JP" sz="1100" dirty="0">
+                <a:solidFill>
+                  <a:schemeClr val="tx1"/>
+                </a:solidFill>
+                <a:latin typeface="Meiryo UI" panose="020B0604030504040204" pitchFamily="50" charset="-128"/>
+                <a:ea typeface="Meiryo UI" panose="020B0604030504040204" pitchFamily="50" charset="-128"/>
+              </a:rPr>
+              <a:t/>
+            </a:r>
+            <a:r>
+              <a:rPr kumimoji="1" lang="ja-JP" altLang="en-US" sz="1100" dirty="0">
+                <a:solidFill>
+                  <a:schemeClr val="tx1"/>
+                </a:solidFill>
+                <a:latin typeface="Meiryo UI" panose="020B0604030504040204" pitchFamily="50" charset="-128"/>
+                <a:ea typeface="Meiryo UI" panose="020B0604030504040204" pitchFamily="50" charset="-128"/>
+              </a:rPr>
+              <a:t/>
+            </a:r>
+          </a:p>
+          <a:p>
+            <a:pPr marL="742950" lvl="1" indent="-285750">
+              <a:buFont typeface="Arial" panose="020B0604020202020204" pitchFamily="34" charset="0"/>
+              <a:buChar char="•"/>
+            </a:pPr>
+            <a:r>
+              <a:rPr kumimoji="1" lang="ja-JP" altLang="en-US" sz="1100" dirty="0">
+                <a:solidFill>
+                  <a:schemeClr val="tx1"/>
+                </a:solidFill>
+                <a:latin typeface="Meiryo UI" panose="020B0604030504040204" pitchFamily="50" charset="-128"/>
+                <a:ea typeface="Meiryo UI" panose="020B0604030504040204" pitchFamily="50" charset="-128"/>
+              </a:rPr>
+              <a:t>→ 契約前に法務・情報セキュリティ部門のレビューを実施（データ越境・委託先管理）</a:t>
+            </a:r>
+          </a:p>
+          <a:p>
+            <a:pPr marL="285750" indent="-285750">
+              <a:buFont typeface="Arial" panose="020B0604020202020204" pitchFamily="34" charset="0"/>
+              <a:buChar char="•"/>
+            </a:pPr>
+            <a:r>
+              <a:rPr kumimoji="1" lang="ja-JP" altLang="en-US" sz="1100" dirty="0">
+                <a:solidFill>
+                  <a:schemeClr val="tx1"/>
+                </a:solidFill>
+                <a:latin typeface="Meiryo UI" panose="020B0604030504040204" pitchFamily="50" charset="-128"/>
+                <a:ea typeface="Meiryo UI" panose="020B0604030504040204" pitchFamily="50" charset="-128"/>
+              </a:rPr>
+              <a:t/>
+            </a:r>
+          </a:p>
+          <a:p>
+            <a:pPr marL="285750" indent="-285750">
+              <a:buFont typeface="Arial" panose="020B0604020202020204" pitchFamily="34" charset="0"/>
+              <a:buChar char="•"/>
+            </a:pPr>
+            <a:r>
+              <a:rPr kumimoji="1" lang="ja-JP" altLang="en-US" sz="1100" dirty="0">
+                <a:solidFill>
+                  <a:schemeClr val="tx1"/>
+                </a:solidFill>
+                <a:latin typeface="Meiryo UI" panose="020B0604030504040204" pitchFamily="50" charset="-128"/>
+                <a:ea typeface="Meiryo UI" panose="020B0604030504040204" pitchFamily="50" charset="-128"/>
+              </a:rPr>
+              <a:t/>
+            </a:r>
+            <a:r>
+              <a:rPr kumimoji="1" lang="en-US" altLang="ja-JP" sz="1100" dirty="0">
+                <a:solidFill>
+                  <a:schemeClr val="tx1"/>
+                </a:solidFill>
+                <a:latin typeface="Meiryo UI" panose="020B0604030504040204" pitchFamily="50" charset="-128"/>
+                <a:ea typeface="Meiryo UI" panose="020B0604030504040204" pitchFamily="50" charset="-128"/>
+              </a:rPr>
+              <a:t/>
+            </a:r>
+            <a:r>
+              <a:rPr kumimoji="1" lang="ja-JP" altLang="en-US" sz="1100" dirty="0">
+                <a:solidFill>
+                  <a:schemeClr val="tx1"/>
+                </a:solidFill>
+                <a:latin typeface="Meiryo UI" panose="020B0604030504040204" pitchFamily="50" charset="-128"/>
+                <a:ea typeface="Meiryo UI" panose="020B0604030504040204" pitchFamily="50" charset="-128"/>
+              </a:rPr>
+              <a:t/>
+            </a:r>
+          </a:p>
+          <a:p>
+            <a:pPr marL="285750" indent="-285750">
+              <a:buFont typeface="Arial" panose="020B0604020202020204" pitchFamily="34" charset="0"/>
+              <a:buChar char="•"/>
+            </a:pPr>
+            <a:r>
+              <a:rPr kumimoji="1" lang="ja-JP" altLang="en-US" sz="1100" dirty="0">
+                <a:solidFill>
+                  <a:schemeClr val="tx1"/>
+                </a:solidFill>
+                <a:latin typeface="Meiryo UI" panose="020B0604030504040204" pitchFamily="50" charset="-128"/>
+                <a:ea typeface="Meiryo UI" panose="020B0604030504040204" pitchFamily="50" charset="-128"/>
+              </a:rPr>
+              <a:t/>
+            </a:r>
+            <a:r>
+              <a:rPr kumimoji="1" lang="en-US" altLang="ja-JP" sz="1100" dirty="0">
+                <a:solidFill>
+                  <a:schemeClr val="tx1"/>
+                </a:solidFill>
+                <a:latin typeface="Meiryo UI" panose="020B0604030504040204" pitchFamily="50" charset="-128"/>
+                <a:ea typeface="Meiryo UI" panose="020B0604030504040204" pitchFamily="50" charset="-128"/>
+              </a:rPr>
+              <a:t/>
+            </a:r>
+            <a:r>
+              <a:rPr kumimoji="1" lang="ja-JP" altLang="en-US" sz="1100" dirty="0">
+                <a:solidFill>
+                  <a:schemeClr val="tx1"/>
+                </a:solidFill>
+                <a:latin typeface="Meiryo UI" panose="020B0604030504040204" pitchFamily="50" charset="-128"/>
+                <a:ea typeface="Meiryo UI" panose="020B0604030504040204" pitchFamily="50" charset="-128"/>
+              </a:rPr>
+              <a:t/>
+            </a:r>
+          </a:p>
+          <a:p>
+            <a:pPr marL="285750" indent="-285750">
+              <a:buFont typeface="Arial" panose="020B0604020202020204" pitchFamily="34" charset="0"/>
+              <a:buChar char="•"/>
+            </a:pPr>
+            <a:r>
+              <a:rPr kumimoji="1" lang="ja-JP" altLang="en-US" sz="1100" dirty="0">
+                <a:solidFill>
+                  <a:schemeClr val="tx1"/>
+                </a:solidFill>
+                <a:latin typeface="Meiryo UI" panose="020B0604030504040204" pitchFamily="50" charset="-128"/>
+                <a:ea typeface="Meiryo UI" panose="020B0604030504040204" pitchFamily="50" charset="-128"/>
+              </a:rPr>
+              <a:t/>
+            </a:r>
+            <a:r>
+              <a:rPr kumimoji="1" lang="en-US" altLang="ja-JP" sz="1100" dirty="0">
+                <a:solidFill>
+                  <a:schemeClr val="tx1"/>
+                </a:solidFill>
+                <a:latin typeface="Meiryo UI" panose="020B0604030504040204" pitchFamily="50" charset="-128"/>
+                <a:ea typeface="Meiryo UI" panose="020B0604030504040204" pitchFamily="50" charset="-128"/>
+              </a:rPr>
+              <a:t/>
+            </a:r>
+            <a:r>
+              <a:rPr kumimoji="1" lang="ja-JP" altLang="en-US" sz="1100" dirty="0">
+                <a:solidFill>
+                  <a:schemeClr val="tx1"/>
+                </a:solidFill>
+                <a:latin typeface="Meiryo UI" panose="020B0604030504040204" pitchFamily="50" charset="-128"/>
+                <a:ea typeface="Meiryo UI" panose="020B0604030504040204" pitchFamily="50" charset="-128"/>
+              </a:rPr>
+              <a:t/>
+            </a:r>
+          </a:p>
+          <a:p>
+            <a:pPr marL="285750" indent="-285750">
+              <a:buFont typeface="Arial" panose="020B0604020202020204" pitchFamily="34" charset="0"/>
+              <a:buChar char="•"/>
+            </a:pPr>
+            <a:r>
+              <a:rPr kumimoji="1" lang="ja-JP" altLang="en-US" sz="1100" dirty="0">
+                <a:solidFill>
+                  <a:schemeClr val="tx1"/>
+                </a:solidFill>
+                <a:latin typeface="Meiryo UI" panose="020B0604030504040204" pitchFamily="50" charset="-128"/>
+                <a:ea typeface="Meiryo UI" panose="020B0604030504040204" pitchFamily="50" charset="-128"/>
+              </a:rPr>
+              <a:t/>
+            </a:r>
+          </a:p>
+          <a:p>
+            <a:pPr marL="285750" indent="-285750">
+              <a:buFont typeface="Arial" panose="020B0604020202020204" pitchFamily="34" charset="0"/>
+              <a:buChar char="•"/>
+            </a:pPr>
+            <a:r>
+              <a:rPr kumimoji="1" lang="ja-JP" altLang="en-US" sz="1100" dirty="0">
+                <a:solidFill>
+                  <a:schemeClr val="tx1"/>
+                </a:solidFill>
+                <a:latin typeface="Meiryo UI" panose="020B0604030504040204" pitchFamily="50" charset="-128"/>
+                <a:ea typeface="Meiryo UI" panose="020B0604030504040204" pitchFamily="50" charset="-128"/>
+              </a:rPr>
+              <a:t/>
+            </a:r>
+          </a:p>
+          <a:p>
+            <a:pPr marL="285750" indent="-285750">
+              <a:buFont typeface="Arial" panose="020B0604020202020204" pitchFamily="34" charset="0"/>
+              <a:buChar char="•"/>
+            </a:pPr>
+            <a:r>
+              <a:rPr kumimoji="1" lang="ja-JP" altLang="en-US" sz="1100" dirty="0">
+                <a:solidFill>
+                  <a:schemeClr val="tx1"/>
+                </a:solidFill>
+                <a:latin typeface="Meiryo UI" panose="020B0604030504040204" pitchFamily="50" charset="-128"/>
+                <a:ea typeface="Meiryo UI" panose="020B0604030504040204" pitchFamily="50" charset="-128"/>
+              </a:rPr>
+              <a:t/>
+            </a:r>
+            <a:endParaRPr kumimoji="1" lang="en-US" altLang="ja-JP" sz="1100" dirty="0">
+              <a:solidFill>
+                <a:schemeClr val="tx1"/>
+              </a:solidFill>
+              <a:latin typeface="Meiryo UI" panose="020B0604030504040204" pitchFamily="50" charset="-128"/>
+              <a:ea typeface="Meiryo UI" panose="020B0604030504040204" pitchFamily="50" charset="-128"/>
+            </a:endParaRPr>
+          </a:p>
+          <a:p>
+            <a:pPr marL="285750" indent="-285750">
+              <a:buFont typeface="Arial" panose="020B0604020202020204" pitchFamily="34" charset="0"/>
+              <a:buChar char="•"/>
+            </a:pPr>
+            <a:r>
+              <a:rPr lang="ja-JP" altLang="en-US" sz="1100" dirty="0">
+                <a:solidFill>
+                  <a:schemeClr val="tx1"/>
+                </a:solidFill>
+                <a:latin typeface="Meiryo UI" panose="020B0604030504040204" pitchFamily="50" charset="-128"/>
+                <a:ea typeface="Meiryo UI" panose="020B0604030504040204" pitchFamily="50" charset="-128"/>
+              </a:rPr>
+              <a:t/>
+            </a:r>
+            <a:endParaRPr lang="en-US" altLang="ja-JP" sz="1100" dirty="0">
+              <a:solidFill>
+                <a:schemeClr val="tx1"/>
+              </a:solidFill>
+              <a:latin typeface="Meiryo UI" panose="020B0604030504040204" pitchFamily="50" charset="-128"/>
+              <a:ea typeface="Meiryo UI" panose="020B0604030504040204" pitchFamily="50" charset="-128"/>
+            </a:endParaRPr>
+          </a:p>
+          <a:p>
+            <a:pPr marL="742950" lvl="1" indent="-285750">
+              <a:buFont typeface="Arial" panose="020B0604020202020204" pitchFamily="34" charset="0"/>
+              <a:buChar char="•"/>
+            </a:pPr>
+            <a:r>
+              <a:rPr lang="ja-JP" altLang="en-US" sz="1100" dirty="0">
+                <a:solidFill>
+                  <a:schemeClr val="tx1"/>
+                </a:solidFill>
+                <a:latin typeface="Meiryo UI" panose="020B0604030504040204" pitchFamily="50" charset="-128"/>
+                <a:ea typeface="Meiryo UI" panose="020B0604030504040204" pitchFamily="50" charset="-128"/>
+              </a:rPr>
+              <a:t/>
+            </a:r>
+            <a:endParaRPr lang="en-US" altLang="ja-JP" sz="1100" dirty="0">
+              <a:solidFill>
+                <a:schemeClr val="tx1"/>
+              </a:solidFill>
+              <a:latin typeface="Meiryo UI" panose="020B0604030504040204" pitchFamily="50" charset="-128"/>
+              <a:ea typeface="Meiryo UI" panose="020B0604030504040204" pitchFamily="50" charset="-128"/>
+            </a:endParaRPr>
+          </a:p>
+          <a:p>
+            <a:pPr marL="285750" indent="-285750">
+              <a:buFont typeface="Arial" panose="020B0604020202020204" pitchFamily="34" charset="0"/>
+              <a:buChar char="•"/>
+            </a:pPr>
+            <a:r>
+              <a:rPr lang="en-US" altLang="ja-JP" sz="1100" dirty="0">
+                <a:solidFill>
+                  <a:schemeClr val="tx1"/>
+                </a:solidFill>
+                <a:latin typeface="Meiryo UI" panose="020B0604030504040204" pitchFamily="50" charset="-128"/>
+                <a:ea typeface="Meiryo UI" panose="020B0604030504040204" pitchFamily="50" charset="-128"/>
+              </a:rPr>
+              <a:t/>
+            </a:r>
+          </a:p>
+        </p:txBody>
+      </p:sp>
+    </p:spTree>
+    <p:extLst>
+      <p:ext uri="{BB962C8B-B14F-4D97-AF65-F5344CB8AC3E}">
+        <p14:creationId xmlns:p14="http://schemas.microsoft.com/office/powerpoint/2010/main" val="2701157942"/>
+      </p:ext>
+    </p:extLst>
+  </p:cSld>
+  <p:clrMapOvr>
+    <a:masterClrMapping/>
+  </p:clrMapOvr>
+</p:sld>
+</file>
+
+<file path=ppt/slides/slide13.xml><?xml version="1.0" encoding="utf-8"?>
+<p:sld xmlns:a="http://schemas.openxmlformats.org/drawingml/2006/main" xmlns:r="http://schemas.openxmlformats.org/officeDocument/2006/relationships" xmlns:p="http://schemas.openxmlformats.org/presentationml/2006/main">
+  <p:cSld>
+    <p:spTree>
+      <p:nvGrpSpPr>
+        <p:cNvPr id="1" name=""/>
+        <p:cNvGrpSpPr/>
+        <p:nvPr/>
+      </p:nvGrpSpPr>
+      <p:grpSpPr>
+        <a:xfrm>
+          <a:off x="0" y="0"/>
+          <a:ext cx="0" cy="0"/>
+          <a:chOff x="0" y="0"/>
+          <a:chExt cx="0" cy="0"/>
+        </a:xfrm>
+      </p:grpSpPr>
+      <p:sp>
+        <p:nvSpPr>
+          <p:cNvPr id="2" name="タイトル 1">
+            <a:extLst>
+              <a:ext uri="{FF2B5EF4-FFF2-40B4-BE49-F238E27FC236}">
+                <a16:creationId xmlns:a16="http://schemas.microsoft.com/office/drawing/2014/main" id="{3A9DF23B-BA22-10F6-2EAF-BAA812C01C4E}"/>
+              </a:ext>
+            </a:extLst>
+          </p:cNvPr>
+          <p:cNvSpPr>
+            <a:spLocks noGrp="1"/>
+          </p:cNvSpPr>
+          <p:nvPr>
+            <p:ph type="title"/>
+          </p:nvPr>
+        </p:nvSpPr>
+        <p:spPr/>
+        <p:txBody>
+          <a:bodyPr/>
+          <a:lstStyle/>
+          <a:p>
+            <a:r>
+              <a:rPr lang="en-US" altLang="ja-JP" dirty="0"/>
+              <a:t>本日ご決裁いただきたい事項</a:t>
+            </a:r>
+            <a:br>
+              <a:rPr lang="en-US" altLang="ja-JP" dirty="0"/>
+            </a:br>
+            <a:r>
+              <a:rPr lang="ja-JP" altLang="en-US" dirty="0"/>
+              <a:t/>
+            </a:r>
+            <a:endParaRPr kumimoji="1" lang="ja-JP" altLang="en-US" dirty="0"/>
+          </a:p>
+        </p:txBody>
+      </p:sp>
+      <p:sp>
+        <p:nvSpPr>
+          <p:cNvPr id="3" name="テキスト プレースホルダー 2">
+            <a:extLst>
+              <a:ext uri="{FF2B5EF4-FFF2-40B4-BE49-F238E27FC236}">
+                <a16:creationId xmlns:a16="http://schemas.microsoft.com/office/drawing/2014/main" id="{2AFD4DED-D640-BD1D-F8CD-28521C342DA3}"/>
+              </a:ext>
+            </a:extLst>
+          </p:cNvPr>
+          <p:cNvSpPr>
+            <a:spLocks noGrp="1"/>
+          </p:cNvSpPr>
+          <p:nvPr>
+            <p:ph type="body" sz="quarter" idx="13"/>
+          </p:nvPr>
+        </p:nvSpPr>
+        <p:spPr/>
+        <p:txBody>
+          <a:bodyPr/>
+          <a:lstStyle/>
+          <a:p>
+            <a:r>
+              <a:rPr lang="ja-JP" altLang="en-US" dirty="0"/>
+              <a:t>本日の承認範囲はPhase 0まで — 移管本体の投資判断は、数字が揃う10月の投資委員会で行う（いつでも引き返せる設計）</a:t>
+            </a:r>
+            <a:endParaRPr lang="en-US" altLang="ja-JP" dirty="0"/>
+          </a:p>
+        </p:txBody>
+      </p:sp>
+      <p:sp>
+        <p:nvSpPr>
+          <p:cNvPr id="4" name="正方形/長方形 3">
+            <a:extLst>
+              <a:ext uri="{FF2B5EF4-FFF2-40B4-BE49-F238E27FC236}">
+                <a16:creationId xmlns:a16="http://schemas.microsoft.com/office/drawing/2014/main" id="{790EBD07-8EFA-8601-EF01-DC465479B26E}"/>
+              </a:ext>
+            </a:extLst>
+          </p:cNvPr>
+          <p:cNvSpPr/>
+          <p:nvPr/>
+        </p:nvSpPr>
+        <p:spPr>
+          <a:xfrm>
+            <a:off x="334963" y="1628775"/>
+            <a:ext cx="11522075" cy="4679950"/>
+          </a:xfrm>
+          <a:prstGeom prst="rect">
+            <a:avLst/>
+          </a:prstGeom>
+          <a:solidFill>
+            <a:schemeClr val="accent6">
+              <a:lumMod val="20000"/>
+              <a:lumOff val="80000"/>
+            </a:schemeClr>
+          </a:solidFill>
+          <a:ln w="3175">
+            <a:noFill/>
+          </a:ln>
+          <a:effectLst/>
+        </p:spPr>
+        <p:style>
+          <a:lnRef idx="1">
+            <a:schemeClr val="accent1"/>
+          </a:lnRef>
+          <a:fillRef idx="3">
+            <a:schemeClr val="accent1"/>
+          </a:fillRef>
+          <a:effectRef idx="2">
+            <a:schemeClr val="accent1"/>
+          </a:effectRef>
+          <a:fontRef idx="minor">
+            <a:schemeClr val="lt1"/>
+          </a:fontRef>
+        </p:style>
+        <p:txBody>
+          <a:bodyPr rot="0" spcFirstLastPara="0" vertOverflow="overflow" horzOverflow="overflow" vert="horz" wrap="square" lIns="36000" tIns="36000" rIns="36000" bIns="36000" numCol="1" spcCol="0" rtlCol="0" fromWordArt="0" anchor="t" anchorCtr="0" forceAA="0" compatLnSpc="1">
+            <a:prstTxWarp prst="textNoShape">
+              <a:avLst/>
+            </a:prstTxWarp>
+            <a:noAutofit/>
+          </a:bodyPr>
+          <a:lstStyle/>
+          <a:p>
+            <a:pPr marL="285750" indent="-285750">
+              <a:buFont typeface="Arial" panose="020B0604020202020204" pitchFamily="34" charset="0"/>
+              <a:buChar char="•"/>
+            </a:pPr>
+            <a:r>
+              <a:rPr kumimoji="1" lang="ja-JP" altLang="en-US" sz="1100" dirty="0">
+                <a:solidFill>
+                  <a:schemeClr val="tx1"/>
+                </a:solidFill>
+                <a:latin typeface="Meiryo UI" panose="020B0604030504040204" pitchFamily="50" charset="-128"/>
+                <a:ea typeface="Meiryo UI" panose="020B0604030504040204" pitchFamily="50" charset="-128"/>
+              </a:rPr>
+              <a:t>① Phase 0（可視化・アセスメント：8〜10月）の着手承認</a:t>
+            </a:r>
+          </a:p>
+          <a:p>
+            <a:pPr marL="742950" lvl="1" indent="-285750">
+              <a:buFont typeface="Arial" panose="020B0604020202020204" pitchFamily="34" charset="0"/>
+              <a:buChar char="•"/>
+            </a:pPr>
+            <a:r>
+              <a:rPr kumimoji="1" lang="ja-JP" altLang="en-US" sz="1100" dirty="0">
+                <a:solidFill>
+                  <a:schemeClr val="tx1"/>
+                </a:solidFill>
+                <a:latin typeface="Meiryo UI" panose="020B0604030504040204" pitchFamily="50" charset="-128"/>
+                <a:ea typeface="Meiryo UI" panose="020B0604030504040204" pitchFamily="50" charset="-128"/>
+              </a:rPr>
+              <a:t>→ 業務棚卸し・工数実測・TCO確定・属人化リスク格付け・データ分類・LEB能力評価。当社工数＋外部支援費の概算：◯百万円（別紙）</a:t>
+            </a:r>
+            <a:r>
+              <a:rPr kumimoji="1" lang="en-US" altLang="ja-JP" sz="1100" dirty="0">
+                <a:solidFill>
+                  <a:schemeClr val="tx1"/>
+                </a:solidFill>
+                <a:latin typeface="Meiryo UI" panose="020B0604030504040204" pitchFamily="50" charset="-128"/>
+                <a:ea typeface="Meiryo UI" panose="020B0604030504040204" pitchFamily="50" charset="-128"/>
+              </a:rPr>
+              <a:t/>
+            </a:r>
+            <a:r>
+              <a:rPr kumimoji="1" lang="ja-JP" altLang="en-US" sz="1100" dirty="0">
+                <a:solidFill>
+                  <a:schemeClr val="tx1"/>
+                </a:solidFill>
+                <a:latin typeface="Meiryo UI" panose="020B0604030504040204" pitchFamily="50" charset="-128"/>
+                <a:ea typeface="Meiryo UI" panose="020B0604030504040204" pitchFamily="50" charset="-128"/>
+              </a:rPr>
+              <a:t/>
+            </a:r>
+            <a:r>
+              <a:rPr kumimoji="1" lang="en-US" altLang="ja-JP" sz="1100" dirty="0">
+                <a:solidFill>
+                  <a:schemeClr val="tx1"/>
+                </a:solidFill>
+                <a:latin typeface="Meiryo UI" panose="020B0604030504040204" pitchFamily="50" charset="-128"/>
+                <a:ea typeface="Meiryo UI" panose="020B0604030504040204" pitchFamily="50" charset="-128"/>
+              </a:rPr>
+              <a:t/>
+            </a:r>
+            <a:r>
+              <a:rPr kumimoji="1" lang="ja-JP" altLang="en-US" sz="1100" dirty="0">
+                <a:solidFill>
+                  <a:schemeClr val="tx1"/>
+                </a:solidFill>
+                <a:latin typeface="Meiryo UI" panose="020B0604030504040204" pitchFamily="50" charset="-128"/>
+                <a:ea typeface="Meiryo UI" panose="020B0604030504040204" pitchFamily="50" charset="-128"/>
+              </a:rPr>
+              <a:t/>
+            </a:r>
+            <a:endParaRPr kumimoji="1" lang="en-US" altLang="ja-JP" sz="1100" dirty="0">
+              <a:solidFill>
+                <a:schemeClr val="tx1"/>
+              </a:solidFill>
+              <a:latin typeface="Meiryo UI" panose="020B0604030504040204" pitchFamily="50" charset="-128"/>
+              <a:ea typeface="Meiryo UI" panose="020B0604030504040204" pitchFamily="50" charset="-128"/>
+            </a:endParaRPr>
+          </a:p>
+          <a:p>
+            <a:pPr marL="285750" indent="-285750">
+              <a:buFont typeface="Arial" panose="020B0604020202020204" pitchFamily="34" charset="0"/>
+              <a:buChar char="•"/>
+            </a:pPr>
+            <a:r>
+              <a:rPr kumimoji="1" lang="ja-JP" altLang="en-US" sz="1100" dirty="0">
+                <a:solidFill>
+                  <a:schemeClr val="tx1"/>
+                </a:solidFill>
+                <a:latin typeface="Meiryo UI" panose="020B0604030504040204" pitchFamily="50" charset="-128"/>
+                <a:ea typeface="Meiryo UI" panose="020B0604030504040204" pitchFamily="50" charset="-128"/>
+              </a:rPr>
+              <a:t>② 移管PMOの設置と責任者任命</a:t>
+            </a:r>
+          </a:p>
+          <a:p>
+            <a:pPr marL="742950" lvl="1" indent="-285750">
+              <a:buFont typeface="Arial" panose="020B0604020202020204" pitchFamily="34" charset="0"/>
+              <a:buChar char="•"/>
+            </a:pPr>
+            <a:r>
+              <a:rPr kumimoji="1" lang="ja-JP" altLang="en-US" sz="1100" dirty="0">
+                <a:solidFill>
+                  <a:schemeClr val="tx1"/>
+                </a:solidFill>
+                <a:latin typeface="Meiryo UI" panose="020B0604030504040204" pitchFamily="50" charset="-128"/>
+                <a:ea typeface="Meiryo UI" panose="020B0604030504040204" pitchFamily="50" charset="-128"/>
+              </a:rPr>
+              <a:t>→ デジタル戦略部長を責任者に週次でゲート運営。LEB・現行ベンダ・実行ベンダを横断管理</a:t>
+            </a:r>
+            <a:endParaRPr kumimoji="1" lang="en-US" altLang="ja-JP" sz="1100" dirty="0">
+              <a:solidFill>
+                <a:schemeClr val="tx1"/>
+              </a:solidFill>
+              <a:latin typeface="Meiryo UI" panose="020B0604030504040204" pitchFamily="50" charset="-128"/>
+              <a:ea typeface="Meiryo UI" panose="020B0604030504040204" pitchFamily="50" charset="-128"/>
+            </a:endParaRPr>
+          </a:p>
+          <a:p>
+            <a:pPr marL="285750" indent="-285750">
+              <a:buFont typeface="Arial" panose="020B0604020202020204" pitchFamily="34" charset="0"/>
+              <a:buChar char="•"/>
+            </a:pPr>
+            <a:r>
+              <a:rPr kumimoji="1" lang="ja-JP" altLang="en-US" sz="1100" dirty="0">
+                <a:solidFill>
+                  <a:schemeClr val="tx1"/>
+                </a:solidFill>
+                <a:latin typeface="Meiryo UI" panose="020B0604030504040204" pitchFamily="50" charset="-128"/>
+                <a:ea typeface="Meiryo UI" panose="020B0604030504040204" pitchFamily="50" charset="-128"/>
+              </a:rPr>
+              <a:t>③ 本方向性の了承</a:t>
+            </a:r>
+          </a:p>
+          <a:p>
+            <a:pPr marL="742950" lvl="1" indent="-285750">
+              <a:buFont typeface="Arial" panose="020B0604020202020204" pitchFamily="34" charset="0"/>
+              <a:buChar char="•"/>
+            </a:pPr>
+            <a:r>
+              <a:rPr kumimoji="1" lang="ja-JP" altLang="en-US" sz="1100" dirty="0">
+                <a:solidFill>
+                  <a:schemeClr val="tx1"/>
+                </a:solidFill>
+                <a:latin typeface="Meiryo UI" panose="020B0604030504040204" pitchFamily="50" charset="-128"/>
+                <a:ea typeface="Meiryo UI" panose="020B0604030504040204" pitchFamily="50" charset="-128"/>
+              </a:rPr>
+              <a:t>→ 構造転換（実行は外部へ・統制はLEBへ）／段階コミット（5ゲート）／FY27費用は現行同水準とする設計方針</a:t>
+            </a:r>
+          </a:p>
+          <a:p>
+            <a:pPr marL="285750" indent="-285750">
+              <a:buFont typeface="Arial" panose="020B0604020202020204" pitchFamily="34" charset="0"/>
+              <a:buChar char="•"/>
+            </a:pPr>
+            <a:r>
+              <a:rPr kumimoji="1" lang="ja-JP" altLang="en-US" sz="1100" dirty="0">
+                <a:solidFill>
+                  <a:schemeClr val="tx1"/>
+                </a:solidFill>
+                <a:latin typeface="Meiryo UI" panose="020B0604030504040204" pitchFamily="50" charset="-128"/>
+                <a:ea typeface="Meiryo UI" panose="020B0604030504040204" pitchFamily="50" charset="-128"/>
+              </a:rPr>
+              <a:t>【今後の意思決定スケジュール】</a:t>
+            </a:r>
+          </a:p>
+          <a:p>
+            <a:pPr marL="742950" lvl="1" indent="-285750">
+              <a:buFont typeface="Arial" panose="020B0604020202020204" pitchFamily="34" charset="0"/>
+              <a:buChar char="•"/>
+            </a:pPr>
+            <a:r>
+              <a:rPr kumimoji="1" lang="ja-JP" altLang="en-US" sz="1100" dirty="0">
+                <a:solidFill>
+                  <a:schemeClr val="tx1"/>
+                </a:solidFill>
+                <a:latin typeface="Meiryo UI" panose="020B0604030504040204" pitchFamily="50" charset="-128"/>
+                <a:ea typeface="Meiryo UI" panose="020B0604030504040204" pitchFamily="50" charset="-128"/>
+              </a:rPr>
+              <a:t>→ 9月：経営会議（Phase 0中間報告・方針承認）／10月：投資委員会（投資承認）→ 契約締結／27年1月末：切替判定／27年4Q：横展開判定</a:t>
+            </a:r>
+          </a:p>
+          <a:p>
+            <a:pPr marL="742950" lvl="1" indent="-285750">
+              <a:buFont typeface="Arial" panose="020B0604020202020204" pitchFamily="34" charset="0"/>
+              <a:buChar char="•"/>
+            </a:pPr>
+            <a:r>
+              <a:rPr kumimoji="1" lang="ja-JP" altLang="en-US" sz="1100" dirty="0">
+                <a:solidFill>
+                  <a:schemeClr val="tx1"/>
+                </a:solidFill>
+                <a:latin typeface="Meiryo UI" panose="020B0604030504040204" pitchFamily="50" charset="-128"/>
+                <a:ea typeface="Meiryo UI" panose="020B0604030504040204" pitchFamily="50" charset="-128"/>
+              </a:rPr>
+              <a:t>→ 各ゲートで「進む・直す・止める」を判断可能 — 本日の決定により失われる選択肢はない</a:t>
+            </a:r>
+          </a:p>
+          <a:p>
+            <a:pPr marL="742950" lvl="1" indent="-285750">
+              <a:buFont typeface="Arial" panose="020B0604020202020204" pitchFamily="34" charset="0"/>
+              <a:buChar char="•"/>
+            </a:pPr>
+            <a:r>
+              <a:rPr kumimoji="1" lang="ja-JP" altLang="en-US" sz="1100" dirty="0">
+                <a:solidFill>
+                  <a:schemeClr val="tx1"/>
+                </a:solidFill>
+                <a:latin typeface="Meiryo UI" panose="020B0604030504040204" pitchFamily="50" charset="-128"/>
+                <a:ea typeface="Meiryo UI" panose="020B0604030504040204" pitchFamily="50" charset="-128"/>
+              </a:rPr>
+              <a:t/>
+            </a:r>
+          </a:p>
+          <a:p>
+            <a:pPr marL="285750" indent="-285750">
+              <a:buFont typeface="Arial" panose="020B0604020202020204" pitchFamily="34" charset="0"/>
+              <a:buChar char="•"/>
+            </a:pPr>
+            <a:r>
+              <a:rPr kumimoji="1" lang="ja-JP" altLang="en-US" sz="1100" dirty="0">
+                <a:solidFill>
+                  <a:schemeClr val="tx1"/>
+                </a:solidFill>
+                <a:latin typeface="Meiryo UI" panose="020B0604030504040204" pitchFamily="50" charset="-128"/>
+                <a:ea typeface="Meiryo UI" panose="020B0604030504040204" pitchFamily="50" charset="-128"/>
+              </a:rPr>
+              <a:t/>
+            </a:r>
+          </a:p>
+          <a:p>
+            <a:pPr marL="742950" lvl="1" indent="-285750">
+              <a:buFont typeface="Arial" panose="020B0604020202020204" pitchFamily="34" charset="0"/>
+              <a:buChar char="•"/>
+            </a:pPr>
+            <a:r>
+              <a:rPr kumimoji="1" lang="ja-JP" altLang="en-US" sz="1100" dirty="0">
+                <a:solidFill>
+                  <a:schemeClr val="tx1"/>
+                </a:solidFill>
+                <a:latin typeface="Meiryo UI" panose="020B0604030504040204" pitchFamily="50" charset="-128"/>
+                <a:ea typeface="Meiryo UI" panose="020B0604030504040204" pitchFamily="50" charset="-128"/>
+              </a:rPr>
+              <a:t/>
+            </a:r>
+            <a:r>
+              <a:rPr kumimoji="1" lang="en-US" altLang="ja-JP" sz="1100" dirty="0">
+                <a:solidFill>
+                  <a:schemeClr val="tx1"/>
+                </a:solidFill>
+                <a:latin typeface="Meiryo UI" panose="020B0604030504040204" pitchFamily="50" charset="-128"/>
+                <a:ea typeface="Meiryo UI" panose="020B0604030504040204" pitchFamily="50" charset="-128"/>
+              </a:rPr>
+              <a:t/>
+            </a:r>
+            <a:r>
+              <a:rPr kumimoji="1" lang="ja-JP" altLang="en-US" sz="1100" dirty="0">
+                <a:solidFill>
+                  <a:schemeClr val="tx1"/>
+                </a:solidFill>
+                <a:latin typeface="Meiryo UI" panose="020B0604030504040204" pitchFamily="50" charset="-128"/>
+                <a:ea typeface="Meiryo UI" panose="020B0604030504040204" pitchFamily="50" charset="-128"/>
+              </a:rPr>
+              <a:t/>
+            </a:r>
+            <a:r>
+              <a:rPr kumimoji="1" lang="en-US" altLang="ja-JP" sz="1100" dirty="0">
+                <a:solidFill>
+                  <a:schemeClr val="tx1"/>
+                </a:solidFill>
+                <a:latin typeface="Meiryo UI" panose="020B0604030504040204" pitchFamily="50" charset="-128"/>
+                <a:ea typeface="Meiryo UI" panose="020B0604030504040204" pitchFamily="50" charset="-128"/>
+              </a:rPr>
+              <a:t/>
+            </a:r>
+            <a:r>
+              <a:rPr kumimoji="1" lang="ja-JP" altLang="en-US" sz="1100" dirty="0">
+                <a:solidFill>
+                  <a:schemeClr val="tx1"/>
+                </a:solidFill>
+                <a:latin typeface="Meiryo UI" panose="020B0604030504040204" pitchFamily="50" charset="-128"/>
+                <a:ea typeface="Meiryo UI" panose="020B0604030504040204" pitchFamily="50" charset="-128"/>
+              </a:rPr>
+              <a:t/>
+            </a:r>
+          </a:p>
+          <a:p>
+            <a:pPr marL="285750" indent="-285750">
+              <a:buFont typeface="Arial" panose="020B0604020202020204" pitchFamily="34" charset="0"/>
+              <a:buChar char="•"/>
+            </a:pPr>
+            <a:r>
+              <a:rPr kumimoji="1" lang="ja-JP" altLang="en-US" sz="1100" dirty="0">
+                <a:solidFill>
+                  <a:schemeClr val="tx1"/>
+                </a:solidFill>
+                <a:latin typeface="Meiryo UI" panose="020B0604030504040204" pitchFamily="50" charset="-128"/>
+                <a:ea typeface="Meiryo UI" panose="020B0604030504040204" pitchFamily="50" charset="-128"/>
+              </a:rPr>
+              <a:t/>
+            </a:r>
+          </a:p>
+          <a:p>
+            <a:pPr marL="285750" indent="-285750">
+              <a:buFont typeface="Arial" panose="020B0604020202020204" pitchFamily="34" charset="0"/>
+              <a:buChar char="•"/>
+            </a:pPr>
+            <a:r>
+              <a:rPr kumimoji="1" lang="ja-JP" altLang="en-US" sz="1100" dirty="0">
+                <a:solidFill>
+                  <a:schemeClr val="tx1"/>
+                </a:solidFill>
+                <a:latin typeface="Meiryo UI" panose="020B0604030504040204" pitchFamily="50" charset="-128"/>
+                <a:ea typeface="Meiryo UI" panose="020B0604030504040204" pitchFamily="50" charset="-128"/>
+              </a:rPr>
+              <a:t/>
+            </a:r>
+          </a:p>
+          <a:p>
+            <a:pPr marL="285750" indent="-285750">
+              <a:buFont typeface="Arial" panose="020B0604020202020204" pitchFamily="34" charset="0"/>
+              <a:buChar char="•"/>
+            </a:pPr>
+            <a:r>
+              <a:rPr kumimoji="1" lang="ja-JP" altLang="en-US" sz="1100" dirty="0">
+                <a:solidFill>
+                  <a:schemeClr val="tx1"/>
+                </a:solidFill>
+                <a:latin typeface="Meiryo UI" panose="020B0604030504040204" pitchFamily="50" charset="-128"/>
+                <a:ea typeface="Meiryo UI" panose="020B0604030504040204" pitchFamily="50" charset="-128"/>
+              </a:rPr>
+              <a:t/>
+            </a:r>
+            <a:r>
+              <a:rPr kumimoji="1" lang="en-US" altLang="ja-JP" sz="1100" dirty="0">
+                <a:solidFill>
+                  <a:schemeClr val="tx1"/>
+                </a:solidFill>
+                <a:latin typeface="Meiryo UI" panose="020B0604030504040204" pitchFamily="50" charset="-128"/>
+                <a:ea typeface="Meiryo UI" panose="020B0604030504040204" pitchFamily="50" charset="-128"/>
+              </a:rPr>
+              <a:t/>
+            </a:r>
+            <a:r>
+              <a:rPr kumimoji="1" lang="ja-JP" altLang="en-US" sz="1100" dirty="0">
+                <a:solidFill>
+                  <a:schemeClr val="tx1"/>
+                </a:solidFill>
+                <a:latin typeface="Meiryo UI" panose="020B0604030504040204" pitchFamily="50" charset="-128"/>
+                <a:ea typeface="Meiryo UI" panose="020B0604030504040204" pitchFamily="50" charset="-128"/>
+              </a:rPr>
+              <a:t/>
+            </a:r>
+          </a:p>
+          <a:p>
+            <a:pPr marL="285750" indent="-285750">
+              <a:buFont typeface="Arial" panose="020B0604020202020204" pitchFamily="34" charset="0"/>
+              <a:buChar char="•"/>
+            </a:pPr>
+            <a:r>
+              <a:rPr kumimoji="1" lang="ja-JP" altLang="en-US" sz="1100" dirty="0">
+                <a:solidFill>
+                  <a:schemeClr val="tx1"/>
+                </a:solidFill>
+                <a:latin typeface="Meiryo UI" panose="020B0604030504040204" pitchFamily="50" charset="-128"/>
+                <a:ea typeface="Meiryo UI" panose="020B0604030504040204" pitchFamily="50" charset="-128"/>
+              </a:rPr>
+              <a:t/>
+            </a:r>
+            <a:r>
+              <a:rPr kumimoji="1" lang="en-US" altLang="ja-JP" sz="1100" dirty="0">
+                <a:solidFill>
+                  <a:schemeClr val="tx1"/>
+                </a:solidFill>
+                <a:latin typeface="Meiryo UI" panose="020B0604030504040204" pitchFamily="50" charset="-128"/>
+                <a:ea typeface="Meiryo UI" panose="020B0604030504040204" pitchFamily="50" charset="-128"/>
+              </a:rPr>
+              <a:t/>
+            </a:r>
+            <a:r>
+              <a:rPr kumimoji="1" lang="ja-JP" altLang="en-US" sz="1100" dirty="0">
+                <a:solidFill>
+                  <a:schemeClr val="tx1"/>
+                </a:solidFill>
+                <a:latin typeface="Meiryo UI" panose="020B0604030504040204" pitchFamily="50" charset="-128"/>
+                <a:ea typeface="Meiryo UI" panose="020B0604030504040204" pitchFamily="50" charset="-128"/>
+              </a:rPr>
+              <a:t/>
+            </a:r>
+          </a:p>
+          <a:p>
+            <a:pPr marL="285750" indent="-285750">
+              <a:buFont typeface="Arial" panose="020B0604020202020204" pitchFamily="34" charset="0"/>
+              <a:buChar char="•"/>
+            </a:pPr>
+            <a:r>
+              <a:rPr kumimoji="1" lang="ja-JP" altLang="en-US" sz="1100" dirty="0">
+                <a:solidFill>
+                  <a:schemeClr val="tx1"/>
+                </a:solidFill>
+                <a:latin typeface="Meiryo UI" panose="020B0604030504040204" pitchFamily="50" charset="-128"/>
+                <a:ea typeface="Meiryo UI" panose="020B0604030504040204" pitchFamily="50" charset="-128"/>
+              </a:rPr>
+              <a:t/>
             </a:r>
             <a:r>
               <a:rPr kumimoji="1" lang="en-US" altLang="ja-JP" sz="1100" dirty="0">
@@ -6152,7 +8234,7 @@
                       <a:schemeClr val="tx1"/>
                     </a:solidFill>
                   </a:rPr>
-                  <a:t>需要+50%を現体制で吸収不能。過負荷の深刻化と管理コストの増大、11億円/日の障害エクスポージャを放置する意思決定に等しい</a:t>
+                  <a:t>需要+50%を現体制で吸収不能。過負荷の深刻化と管理コストの増大、11億円/日の障害エクスポージャを放置する意思決定に等しい（ゴール充足：G1✕ G2✕ G3✕ G4✕）</a:t>
                 </a:r>
                 <a:r>
                   <a:rPr lang="ja-JP" altLang="en-US" sz="1100" dirty="0">
@@ -6248,7 +8330,7 @@
                       <a:schemeClr val="tx1"/>
                     </a:solidFill>
                   </a:rPr>
-                  <a:t>B. 内製強化（</a:t>
+                  <a:t>B. 内製強化（内製増員・採用）（棄却）</a:t>
                 </a:r>
                 <a:r>
                   <a:rPr lang="ja-JP" altLang="en-US" sz="1100" dirty="0">
@@ -6256,7 +8338,7 @@
                       <a:schemeClr val="tx1"/>
                     </a:solidFill>
                   </a:rPr>
-                  <a:t>内製増員・</a:t>
+                  <a:t/>
                 </a:r>
                 <a:r>
                   <a:rPr lang="ja-JP" altLang="ja-JP" sz="1100" dirty="0">
@@ -6264,7 +8346,7 @@
                       <a:schemeClr val="tx1"/>
                     </a:solidFill>
                   </a:rPr>
-                  <a:t>採用）</a:t>
+                  <a:t/>
                 </a:r>
                 <a:endParaRPr lang="en-US" altLang="ja-JP" sz="1100" dirty="0">
                   <a:solidFill>
@@ -6279,7 +8361,7 @@
                       <a:schemeClr val="tx1"/>
                     </a:solidFill>
                   </a:rPr>
-                  <a:t>運用人材は採っていない・採れない（IT人材は2030年に最大79万人不足）。仮に採れても1,500万円/名×人数×年数の育成投資が離職で消え、AI等の先端運用技術への投資・スキル保持も自社単独では構造的に不利。</a:t>
+                  <a:t>運用人材は採っていない・採れない（IT人材は2030年に最大79万人不足）。仮に採れても1,500万円/名×人数×年数の育成投資が離職で消え、AI等の先端運用技術への投資・スキル保持も自社単独では構造的に不利（G1✕ G2✕ G3△ G4✕）。</a:t>
                 </a:r>
                 <a:r>
                   <a:rPr lang="en-US" altLang="ja-JP" sz="1100" dirty="0">
@@ -6413,7 +8495,7 @@
                       <a:schemeClr val="tx1"/>
                     </a:solidFill>
                   </a:rPr>
-                  <a:t>SLAも検収基準もないまま出せば、今のブラックボックスが社外で拡大再生産されるだけ。低品質の尻拭い工数は減らない。</a:t>
+                  <a:t>SLAも検収基準もないまま出せば、今のブラックボックスが社外で拡大再生産されるだけ。低品質の尻拭い工数は減らない（G1○ G2△ G3✕ G4△）。</a:t>
                 </a:r>
               </a:p>
               <a:p>
@@ -6518,7 +8600,7 @@
                     <a:latin typeface="Meiryo UI" panose="020B0604030504040204" pitchFamily="50" charset="-128"/>
                     <a:ea typeface="Meiryo UI" panose="020B0604030504040204" pitchFamily="50" charset="-128"/>
                   </a:rPr>
-                  <a:t>実行は外部へ、品質・コストを統制する力はグループ会社LEBに集約して残す（新会社の設立は不要）。Aの放置コストもBの採用依存もCの丸投げリスクも同時に解消する唯一の構成</a:t>
+                  <a:t>実行は外部へ、品質・コストを統制する力はグループ会社LEB（当社シェアードサービス会社）に集約して残す（新会社の設立は不要）。Aの放置コストもBの採用依存もCの丸投げリスクも同時に解消する唯一の構成（G1○ G2○ G3○ G4○）</a:t>
                 </a:r>
                 <a:r>
                   <a:rPr kumimoji="1" lang="en-US" altLang="ja-JP" sz="1100" dirty="0">
@@ -6788,7 +8870,7 @@
           <a:p>
             <a:r>
               <a:rPr kumimoji="1" lang="ja-JP" altLang="en-US" sz="1800" dirty="0"/>
-              <a:t>「実行は外部へ、統制はグループ会社LEBに集約して残す」構造転換が必要</a:t>
+              <a:t>実行は外部へ、統制はLEBへ — 3階層それぞれの役割と、それを実現する5つの手段</a:t>
             </a:r>
             <a:r>
               <a:rPr kumimoji="1" lang="en-US" altLang="ja-JP" sz="1800" dirty="0"/>
@@ -9988,23 +12070,23 @@
           <a:p>
             <a:r>
               <a:rPr kumimoji="1" lang="ja-JP" altLang="en-US" dirty="0"/>
-              <a:t>成果は</a:t>
+              <a:t>成果は6つのKPIで毎年経営に報告する</a:t>
             </a:r>
             <a:r>
               <a:rPr kumimoji="1" lang="en-US" altLang="ja-JP" dirty="0"/>
-              <a:t>5</a:t>
+              <a:t/>
             </a:r>
             <a:r>
               <a:rPr kumimoji="1" lang="ja-JP" altLang="en-US" dirty="0"/>
-              <a:t>つの</a:t>
+              <a:t/>
             </a:r>
             <a:r>
               <a:rPr kumimoji="1" lang="en-US" altLang="ja-JP" dirty="0"/>
-              <a:t>KPI</a:t>
+              <a:t/>
             </a:r>
             <a:r>
               <a:rPr kumimoji="1" lang="ja-JP" altLang="en-US" dirty="0"/>
-              <a:t>で毎年経営に報告する</a:t>
+              <a:t/>
             </a:r>
           </a:p>
         </p:txBody>
@@ -10228,6 +12310,82 @@
                 <a:ea typeface="Meiryo UI" panose="020B0604030504040204" pitchFamily="50" charset="-128"/>
               </a:rPr>
               <a:t>が実施できる状態に</a:t>
+            </a:r>
+          </a:p>
+          <a:p>
+            <a:pPr marL="742950" lvl="1" indent="-285750">
+              <a:buFont typeface="Arial" panose="020B0604020202020204" pitchFamily="34" charset="0"/>
+              <a:buChar char="•"/>
+            </a:pPr>
+            <a:r>
+              <a:rPr kumimoji="1" lang="ja-JP" altLang="en-US" sz="1400" dirty="0">
+                <a:solidFill>
+                  <a:schemeClr val="tx1"/>
+                </a:solidFill>
+                <a:latin typeface="Meiryo UI" panose="020B0604030504040204" pitchFamily="50" charset="-128"/>
+                <a:ea typeface="Meiryo UI" panose="020B0604030504040204" pitchFamily="50" charset="-128"/>
+              </a:rPr>
+              <a:t>LEB経営層との役割・体制の協議はPhase 0で実施し、合意の上で移管を開始</a:t>
+            </a:r>
+            <a:r>
+              <a:rPr kumimoji="1" lang="en-US" altLang="ja-JP" sz="1400" dirty="0">
+                <a:solidFill>
+                  <a:schemeClr val="tx1"/>
+                </a:solidFill>
+                <a:latin typeface="Meiryo UI" panose="020B0604030504040204" pitchFamily="50" charset="-128"/>
+                <a:ea typeface="Meiryo UI" panose="020B0604030504040204" pitchFamily="50" charset="-128"/>
+              </a:rPr>
+              <a:t/>
+            </a:r>
+            <a:r>
+              <a:rPr kumimoji="1" lang="ja-JP" altLang="en-US" sz="1400" dirty="0">
+                <a:solidFill>
+                  <a:schemeClr val="tx1"/>
+                </a:solidFill>
+                <a:latin typeface="Meiryo UI" panose="020B0604030504040204" pitchFamily="50" charset="-128"/>
+                <a:ea typeface="Meiryo UI" panose="020B0604030504040204" pitchFamily="50" charset="-128"/>
+              </a:rPr>
+              <a:t/>
+            </a:r>
+            <a:r>
+              <a:rPr kumimoji="1" lang="en-US" altLang="ja-JP" sz="1400" dirty="0">
+                <a:solidFill>
+                  <a:schemeClr val="tx1"/>
+                </a:solidFill>
+                <a:latin typeface="Meiryo UI" panose="020B0604030504040204" pitchFamily="50" charset="-128"/>
+                <a:ea typeface="Meiryo UI" panose="020B0604030504040204" pitchFamily="50" charset="-128"/>
+              </a:rPr>
+              <a:t/>
+            </a:r>
+            <a:r>
+              <a:rPr kumimoji="1" lang="ja-JP" altLang="en-US" sz="1400" dirty="0">
+                <a:solidFill>
+                  <a:schemeClr val="tx1"/>
+                </a:solidFill>
+                <a:latin typeface="Meiryo UI" panose="020B0604030504040204" pitchFamily="50" charset="-128"/>
+                <a:ea typeface="Meiryo UI" panose="020B0604030504040204" pitchFamily="50" charset="-128"/>
+              </a:rPr>
+              <a:t/>
+            </a:r>
+            <a:r>
+              <a:rPr kumimoji="1" lang="en-US" altLang="ja-JP" sz="1400" dirty="0">
+                <a:solidFill>
+                  <a:schemeClr val="tx1"/>
+                </a:solidFill>
+                <a:latin typeface="Meiryo UI" panose="020B0604030504040204" pitchFamily="50" charset="-128"/>
+                <a:ea typeface="Meiryo UI" panose="020B0604030504040204" pitchFamily="50" charset="-128"/>
+              </a:rPr>
+              <a:t/>
+            </a:r>
+            <a:r>
+              <a:rPr kumimoji="1" lang="ja-JP" altLang="en-US" sz="1400" dirty="0">
+                <a:solidFill>
+                  <a:schemeClr val="tx1"/>
+                </a:solidFill>
+                <a:latin typeface="Meiryo UI" panose="020B0604030504040204" pitchFamily="50" charset="-128"/>
+                <a:ea typeface="Meiryo UI" panose="020B0604030504040204" pitchFamily="50" charset="-128"/>
+              </a:rPr>
+              <a:t/>
             </a:r>
           </a:p>
           <a:p>
